--- a/Capstone_Presentation.pptx
+++ b/Capstone_Presentation.pptx
@@ -3093,7 +3093,7 @@
     <p:bg>
       <p:bgPr>
         <a:solidFill>
-          <a:srgbClr val="1A1A2E"/>
+          <a:srgbClr val="0F0F0F"/>
         </a:solidFill>
         <a:effectLst/>
       </p:bgPr>
@@ -3113,14 +3113,14 @@
         </p:nvSpPr>
         <p:spPr>
           <a:xfrm>
-            <a:off x="0" y="2926080"/>
-            <a:ext cx="12191695" cy="54864"/>
+            <a:off x="0" y="0"/>
+            <a:ext cx="54864" cy="6858000"/>
           </a:xfrm>
           <a:prstGeom prst="rect">
             <a:avLst/>
           </a:prstGeom>
           <a:solidFill>
-            <a:srgbClr val="533CD0"/>
+            <a:srgbClr val="6C63FF"/>
           </a:solidFill>
           <a:ln>
             <a:noFill/>
@@ -3150,14 +3150,186 @@
       </p:sp>
       <p:sp>
         <p:nvSpPr>
-          <p:cNvPr id="3" name="TextBox 2"/>
+          <p:cNvPr id="3" name="Rectangle 2"/>
+          <p:cNvSpPr/>
+          <p:nvPr/>
+        </p:nvSpPr>
+        <p:spPr>
+          <a:xfrm>
+            <a:off x="54864" y="1371600"/>
+            <a:ext cx="12191695" cy="9144"/>
+          </a:xfrm>
+          <a:prstGeom prst="rect">
+            <a:avLst/>
+          </a:prstGeom>
+          <a:solidFill>
+            <a:srgbClr val="222222"/>
+          </a:solidFill>
+          <a:ln>
+            <a:noFill/>
+          </a:ln>
+        </p:spPr>
+        <p:style>
+          <a:lnRef idx="1">
+            <a:schemeClr val="accent1"/>
+          </a:lnRef>
+          <a:fillRef idx="3">
+            <a:schemeClr val="accent1"/>
+          </a:fillRef>
+          <a:effectRef idx="2">
+            <a:schemeClr val="accent1"/>
+          </a:effectRef>
+          <a:fontRef idx="minor">
+            <a:schemeClr val="lt1"/>
+          </a:fontRef>
+        </p:style>
+        <p:txBody>
+          <a:bodyPr rtlCol="0" anchor="ctr"/>
+          <a:lstStyle/>
+          <a:p>
+            <a:pPr algn="ctr"/>
+          </a:p>
+        </p:txBody>
+      </p:sp>
+      <p:sp>
+        <p:nvSpPr>
+          <p:cNvPr id="4" name="Rectangle 3"/>
+          <p:cNvSpPr/>
+          <p:nvPr/>
+        </p:nvSpPr>
+        <p:spPr>
+          <a:xfrm>
+            <a:off x="54864" y="2743200"/>
+            <a:ext cx="12191695" cy="9144"/>
+          </a:xfrm>
+          <a:prstGeom prst="rect">
+            <a:avLst/>
+          </a:prstGeom>
+          <a:solidFill>
+            <a:srgbClr val="222222"/>
+          </a:solidFill>
+          <a:ln>
+            <a:noFill/>
+          </a:ln>
+        </p:spPr>
+        <p:style>
+          <a:lnRef idx="1">
+            <a:schemeClr val="accent1"/>
+          </a:lnRef>
+          <a:fillRef idx="3">
+            <a:schemeClr val="accent1"/>
+          </a:fillRef>
+          <a:effectRef idx="2">
+            <a:schemeClr val="accent1"/>
+          </a:effectRef>
+          <a:fontRef idx="minor">
+            <a:schemeClr val="lt1"/>
+          </a:fontRef>
+        </p:style>
+        <p:txBody>
+          <a:bodyPr rtlCol="0" anchor="ctr"/>
+          <a:lstStyle/>
+          <a:p>
+            <a:pPr algn="ctr"/>
+          </a:p>
+        </p:txBody>
+      </p:sp>
+      <p:sp>
+        <p:nvSpPr>
+          <p:cNvPr id="5" name="Rectangle 4"/>
+          <p:cNvSpPr/>
+          <p:nvPr/>
+        </p:nvSpPr>
+        <p:spPr>
+          <a:xfrm>
+            <a:off x="54864" y="4114800"/>
+            <a:ext cx="12191695" cy="9144"/>
+          </a:xfrm>
+          <a:prstGeom prst="rect">
+            <a:avLst/>
+          </a:prstGeom>
+          <a:solidFill>
+            <a:srgbClr val="222222"/>
+          </a:solidFill>
+          <a:ln>
+            <a:noFill/>
+          </a:ln>
+        </p:spPr>
+        <p:style>
+          <a:lnRef idx="1">
+            <a:schemeClr val="accent1"/>
+          </a:lnRef>
+          <a:fillRef idx="3">
+            <a:schemeClr val="accent1"/>
+          </a:fillRef>
+          <a:effectRef idx="2">
+            <a:schemeClr val="accent1"/>
+          </a:effectRef>
+          <a:fontRef idx="minor">
+            <a:schemeClr val="lt1"/>
+          </a:fontRef>
+        </p:style>
+        <p:txBody>
+          <a:bodyPr rtlCol="0" anchor="ctr"/>
+          <a:lstStyle/>
+          <a:p>
+            <a:pPr algn="ctr"/>
+          </a:p>
+        </p:txBody>
+      </p:sp>
+      <p:sp>
+        <p:nvSpPr>
+          <p:cNvPr id="6" name="Rectangle 5"/>
+          <p:cNvSpPr/>
+          <p:nvPr/>
+        </p:nvSpPr>
+        <p:spPr>
+          <a:xfrm>
+            <a:off x="54864" y="5486400"/>
+            <a:ext cx="12191695" cy="9144"/>
+          </a:xfrm>
+          <a:prstGeom prst="rect">
+            <a:avLst/>
+          </a:prstGeom>
+          <a:solidFill>
+            <a:srgbClr val="222222"/>
+          </a:solidFill>
+          <a:ln>
+            <a:noFill/>
+          </a:ln>
+        </p:spPr>
+        <p:style>
+          <a:lnRef idx="1">
+            <a:schemeClr val="accent1"/>
+          </a:lnRef>
+          <a:fillRef idx="3">
+            <a:schemeClr val="accent1"/>
+          </a:fillRef>
+          <a:effectRef idx="2">
+            <a:schemeClr val="accent1"/>
+          </a:effectRef>
+          <a:fontRef idx="minor">
+            <a:schemeClr val="lt1"/>
+          </a:fontRef>
+        </p:style>
+        <p:txBody>
+          <a:bodyPr rtlCol="0" anchor="ctr"/>
+          <a:lstStyle/>
+          <a:p>
+            <a:pPr algn="ctr"/>
+          </a:p>
+        </p:txBody>
+      </p:sp>
+      <p:sp>
+        <p:nvSpPr>
+          <p:cNvPr id="7" name="TextBox 6"/>
           <p:cNvSpPr txBox="1"/>
           <p:nvPr/>
         </p:nvSpPr>
         <p:spPr>
           <a:xfrm>
-            <a:off x="914400" y="1371600"/>
-            <a:ext cx="10058400" cy="1371600"/>
+            <a:off x="914400" y="1645920"/>
+            <a:ext cx="10058400" cy="457200"/>
           </a:xfrm>
           <a:prstGeom prst="rect">
             <a:avLst/>
@@ -3170,30 +3342,30 @@
           </a:bodyPr>
           <a:lstStyle/>
           <a:p>
-            <a:pPr algn="ctr">
-              <a:defRPr sz="4400" b="1">
-                <a:solidFill>
-                  <a:srgbClr val="FFFFFF"/>
-                </a:solidFill>
-                <a:latin typeface="Calibri"/>
-              </a:defRPr>
-            </a:pPr>
-            <a:r>
-              <a:t>Personal Wardrobe Intelligence</a:t>
-            </a:r>
-          </a:p>
-        </p:txBody>
-      </p:sp>
-      <p:sp>
-        <p:nvSpPr>
-          <p:cNvPr id="4" name="TextBox 3"/>
+            <a:pPr algn="l">
+              <a:defRPr sz="1400" b="1" i="0">
+                <a:solidFill>
+                  <a:srgbClr val="6C63FF"/>
+                </a:solidFill>
+                <a:latin typeface="Calibri"/>
+              </a:defRPr>
+            </a:pPr>
+            <a:r>
+              <a:t>CAPSTONE PROJECT</a:t>
+            </a:r>
+          </a:p>
+        </p:txBody>
+      </p:sp>
+      <p:sp>
+        <p:nvSpPr>
+          <p:cNvPr id="8" name="TextBox 7"/>
           <p:cNvSpPr txBox="1"/>
           <p:nvPr/>
         </p:nvSpPr>
         <p:spPr>
           <a:xfrm>
-            <a:off x="914400" y="3200400"/>
-            <a:ext cx="10058400" cy="914400"/>
+            <a:off x="914400" y="2103120"/>
+            <a:ext cx="10058400" cy="1463040"/>
           </a:xfrm>
           <a:prstGeom prst="rect">
             <a:avLst/>
@@ -3206,30 +3378,73 @@
           </a:bodyPr>
           <a:lstStyle/>
           <a:p>
-            <a:pPr algn="ctr">
-              <a:defRPr sz="2200" b="0">
-                <a:solidFill>
-                  <a:srgbClr val="BBBBCC"/>
-                </a:solidFill>
-                <a:latin typeface="Calibri"/>
-              </a:defRPr>
-            </a:pPr>
-            <a:r>
-              <a:t>Visual Clothing Retrieval with FashionCLIP, FAISS, and Preference-Aware Reranking</a:t>
-            </a:r>
-          </a:p>
-        </p:txBody>
-      </p:sp>
-      <p:sp>
-        <p:nvSpPr>
-          <p:cNvPr id="5" name="TextBox 4"/>
+            <a:pPr algn="l">
+              <a:defRPr sz="4600" b="1" i="0">
+                <a:solidFill>
+                  <a:srgbClr val="FFFFFF"/>
+                </a:solidFill>
+                <a:latin typeface="Calibri"/>
+              </a:defRPr>
+            </a:pPr>
+            <a:r>
+              <a:t>Personal Wardrobe Intelligence</a:t>
+            </a:r>
+          </a:p>
+        </p:txBody>
+      </p:sp>
+      <p:sp>
+        <p:nvSpPr>
+          <p:cNvPr id="9" name="Rectangle 8"/>
+          <p:cNvSpPr/>
+          <p:nvPr/>
+        </p:nvSpPr>
+        <p:spPr>
+          <a:xfrm>
+            <a:off x="914400" y="3657600"/>
+            <a:ext cx="4572000" cy="36576"/>
+          </a:xfrm>
+          <a:prstGeom prst="rect">
+            <a:avLst/>
+          </a:prstGeom>
+          <a:solidFill>
+            <a:srgbClr val="00C9A7"/>
+          </a:solidFill>
+          <a:ln>
+            <a:noFill/>
+          </a:ln>
+        </p:spPr>
+        <p:style>
+          <a:lnRef idx="1">
+            <a:schemeClr val="accent1"/>
+          </a:lnRef>
+          <a:fillRef idx="3">
+            <a:schemeClr val="accent1"/>
+          </a:fillRef>
+          <a:effectRef idx="2">
+            <a:schemeClr val="accent1"/>
+          </a:effectRef>
+          <a:fontRef idx="minor">
+            <a:schemeClr val="lt1"/>
+          </a:fontRef>
+        </p:style>
+        <p:txBody>
+          <a:bodyPr rtlCol="0" anchor="ctr"/>
+          <a:lstStyle/>
+          <a:p>
+            <a:pPr algn="ctr"/>
+          </a:p>
+        </p:txBody>
+      </p:sp>
+      <p:sp>
+        <p:nvSpPr>
+          <p:cNvPr id="10" name="TextBox 9"/>
           <p:cNvSpPr txBox="1"/>
           <p:nvPr/>
         </p:nvSpPr>
         <p:spPr>
           <a:xfrm>
-            <a:off x="914400" y="4754880"/>
-            <a:ext cx="10058400" cy="548640"/>
+            <a:off x="914400" y="3931920"/>
+            <a:ext cx="9144000" cy="548640"/>
           </a:xfrm>
           <a:prstGeom prst="rect">
             <a:avLst/>
@@ -3242,16 +3457,52 @@
           </a:bodyPr>
           <a:lstStyle/>
           <a:p>
-            <a:pPr algn="ctr">
-              <a:defRPr sz="1800" b="0">
-                <a:solidFill>
-                  <a:srgbClr val="7C6BE6"/>
-                </a:solidFill>
-                <a:latin typeface="Calibri"/>
-              </a:defRPr>
-            </a:pPr>
-            <a:r>
-              <a:t>Capstone Project  |  April 2026</a:t>
+            <a:pPr algn="l">
+              <a:defRPr sz="1900" b="0" i="0">
+                <a:solidFill>
+                  <a:srgbClr val="888899"/>
+                </a:solidFill>
+                <a:latin typeface="Calibri"/>
+              </a:defRPr>
+            </a:pPr>
+            <a:r>
+              <a:t>Visual Similarity Retrieval  ·  Preference Reranking  ·  FashionCLIP + FAISS</a:t>
+            </a:r>
+          </a:p>
+        </p:txBody>
+      </p:sp>
+      <p:sp>
+        <p:nvSpPr>
+          <p:cNvPr id="11" name="TextBox 10"/>
+          <p:cNvSpPr txBox="1"/>
+          <p:nvPr/>
+        </p:nvSpPr>
+        <p:spPr>
+          <a:xfrm>
+            <a:off x="914400" y="5303520"/>
+            <a:ext cx="5486400" cy="365760"/>
+          </a:xfrm>
+          <a:prstGeom prst="rect">
+            <a:avLst/>
+          </a:prstGeom>
+          <a:noFill/>
+        </p:spPr>
+        <p:txBody>
+          <a:bodyPr wrap="square">
+            <a:spAutoFit/>
+          </a:bodyPr>
+          <a:lstStyle/>
+          <a:p>
+            <a:pPr algn="l">
+              <a:defRPr sz="1600" b="0" i="0">
+                <a:solidFill>
+                  <a:srgbClr val="888899"/>
+                </a:solidFill>
+                <a:latin typeface="Calibri"/>
+              </a:defRPr>
+            </a:pPr>
+            <a:r>
+              <a:t>April 2026</a:t>
             </a:r>
           </a:p>
         </p:txBody>
@@ -3270,7 +3521,7 @@
     <p:bg>
       <p:bgPr>
         <a:solidFill>
-          <a:srgbClr val="1A1A2E"/>
+          <a:srgbClr val="0F0F0F"/>
         </a:solidFill>
         <a:effectLst/>
       </p:bgPr>
@@ -3290,14 +3541,14 @@
         </p:nvSpPr>
         <p:spPr>
           <a:xfrm>
-            <a:off x="0" y="2926080"/>
-            <a:ext cx="12191695" cy="54864"/>
+            <a:off x="0" y="0"/>
+            <a:ext cx="54864" cy="6858000"/>
           </a:xfrm>
           <a:prstGeom prst="rect">
             <a:avLst/>
           </a:prstGeom>
           <a:solidFill>
-            <a:srgbClr val="533CD0"/>
+            <a:srgbClr val="6C63FF"/>
           </a:solidFill>
           <a:ln>
             <a:noFill/>
@@ -3333,8 +3584,8 @@
         </p:nvSpPr>
         <p:spPr>
           <a:xfrm>
-            <a:off x="914400" y="2011680"/>
-            <a:ext cx="10058400" cy="1097280"/>
+            <a:off x="914400" y="2286000"/>
+            <a:ext cx="10058400" cy="914400"/>
           </a:xfrm>
           <a:prstGeom prst="rect">
             <a:avLst/>
@@ -3348,7 +3599,7 @@
           <a:lstStyle/>
           <a:p>
             <a:pPr algn="ctr">
-              <a:defRPr sz="4800" b="1">
+              <a:defRPr sz="5200" b="1" i="0">
                 <a:solidFill>
                   <a:srgbClr val="FFFFFF"/>
                 </a:solidFill>
@@ -3363,14 +3614,57 @@
       </p:sp>
       <p:sp>
         <p:nvSpPr>
-          <p:cNvPr id="4" name="TextBox 3"/>
+          <p:cNvPr id="4" name="Rectangle 3"/>
+          <p:cNvSpPr/>
+          <p:nvPr/>
+        </p:nvSpPr>
+        <p:spPr>
+          <a:xfrm>
+            <a:off x="3657600" y="3474720"/>
+            <a:ext cx="4846320" cy="36576"/>
+          </a:xfrm>
+          <a:prstGeom prst="rect">
+            <a:avLst/>
+          </a:prstGeom>
+          <a:solidFill>
+            <a:srgbClr val="6C63FF"/>
+          </a:solidFill>
+          <a:ln>
+            <a:noFill/>
+          </a:ln>
+        </p:spPr>
+        <p:style>
+          <a:lnRef idx="1">
+            <a:schemeClr val="accent1"/>
+          </a:lnRef>
+          <a:fillRef idx="3">
+            <a:schemeClr val="accent1"/>
+          </a:fillRef>
+          <a:effectRef idx="2">
+            <a:schemeClr val="accent1"/>
+          </a:effectRef>
+          <a:fontRef idx="minor">
+            <a:schemeClr val="lt1"/>
+          </a:fontRef>
+        </p:style>
+        <p:txBody>
+          <a:bodyPr rtlCol="0" anchor="ctr"/>
+          <a:lstStyle/>
+          <a:p>
+            <a:pPr algn="ctr"/>
+          </a:p>
+        </p:txBody>
+      </p:sp>
+      <p:sp>
+        <p:nvSpPr>
+          <p:cNvPr id="5" name="TextBox 4"/>
           <p:cNvSpPr txBox="1"/>
           <p:nvPr/>
         </p:nvSpPr>
         <p:spPr>
           <a:xfrm>
-            <a:off x="914400" y="3291840"/>
-            <a:ext cx="10058400" cy="731520"/>
+            <a:off x="914400" y="3749039"/>
+            <a:ext cx="10058400" cy="457200"/>
           </a:xfrm>
           <a:prstGeom prst="rect">
             <a:avLst/>
@@ -3384,9 +3678,9 @@
           <a:lstStyle/>
           <a:p>
             <a:pPr algn="ctr">
-              <a:defRPr sz="2800" b="0">
-                <a:solidFill>
-                  <a:srgbClr val="BBBBCC"/>
+              <a:defRPr sz="2600" b="0" i="0">
+                <a:solidFill>
+                  <a:srgbClr val="888899"/>
                 </a:solidFill>
                 <a:latin typeface="Calibri"/>
               </a:defRPr>
@@ -3399,14 +3693,14 @@
       </p:sp>
       <p:sp>
         <p:nvSpPr>
-          <p:cNvPr id="5" name="TextBox 4"/>
+          <p:cNvPr id="6" name="TextBox 5"/>
           <p:cNvSpPr txBox="1"/>
           <p:nvPr/>
         </p:nvSpPr>
         <p:spPr>
           <a:xfrm>
-            <a:off x="914400" y="4572000"/>
-            <a:ext cx="10058400" cy="548640"/>
+            <a:off x="914400" y="5029200"/>
+            <a:ext cx="10058400" cy="457200"/>
           </a:xfrm>
           <a:prstGeom prst="rect">
             <a:avLst/>
@@ -3420,9 +3714,9 @@
           <a:lstStyle/>
           <a:p>
             <a:pPr algn="ctr">
-              <a:defRPr sz="1800" b="0">
-                <a:solidFill>
-                  <a:srgbClr val="7C6BE6"/>
+              <a:defRPr sz="1600" b="0" i="0">
+                <a:solidFill>
+                  <a:srgbClr val="888899"/>
                 </a:solidFill>
                 <a:latin typeface="Consolas"/>
               </a:defRPr>
@@ -3447,7 +3741,7 @@
     <p:bg>
       <p:bgPr>
         <a:solidFill>
-          <a:srgbClr val="1A1A2E"/>
+          <a:srgbClr val="0F0F0F"/>
         </a:solidFill>
         <a:effectLst/>
       </p:bgPr>
@@ -3467,14 +3761,14 @@
         </p:nvSpPr>
         <p:spPr>
           <a:xfrm>
-            <a:off x="731520" y="731520"/>
-            <a:ext cx="73152" cy="548640"/>
+            <a:off x="0" y="0"/>
+            <a:ext cx="54864" cy="6858000"/>
           </a:xfrm>
           <a:prstGeom prst="rect">
             <a:avLst/>
           </a:prstGeom>
           <a:solidFill>
-            <a:srgbClr val="533CD0"/>
+            <a:srgbClr val="FF6B6B"/>
           </a:solidFill>
           <a:ln>
             <a:noFill/>
@@ -3510,8 +3804,8 @@
         </p:nvSpPr>
         <p:spPr>
           <a:xfrm>
-            <a:off x="1005840" y="640080"/>
-            <a:ext cx="9144000" cy="731520"/>
+            <a:off x="822960" y="502920"/>
+            <a:ext cx="9144000" cy="640080"/>
           </a:xfrm>
           <a:prstGeom prst="rect">
             <a:avLst/>
@@ -3525,7 +3819,7 @@
           <a:lstStyle/>
           <a:p>
             <a:pPr algn="l">
-              <a:defRPr sz="3600" b="1">
+              <a:defRPr sz="3600" b="1" i="0">
                 <a:solidFill>
                   <a:srgbClr val="FFFFFF"/>
                 </a:solidFill>
@@ -3540,14 +3834,57 @@
       </p:sp>
       <p:sp>
         <p:nvSpPr>
-          <p:cNvPr id="4" name="TextBox 3"/>
+          <p:cNvPr id="4" name="Rectangle 3"/>
+          <p:cNvSpPr/>
+          <p:nvPr/>
+        </p:nvSpPr>
+        <p:spPr>
+          <a:xfrm>
+            <a:off x="731520" y="1234440"/>
+            <a:ext cx="10698480" cy="36576"/>
+          </a:xfrm>
+          <a:prstGeom prst="rect">
+            <a:avLst/>
+          </a:prstGeom>
+          <a:solidFill>
+            <a:srgbClr val="FF6B6B"/>
+          </a:solidFill>
+          <a:ln>
+            <a:noFill/>
+          </a:ln>
+        </p:spPr>
+        <p:style>
+          <a:lnRef idx="1">
+            <a:schemeClr val="accent1"/>
+          </a:lnRef>
+          <a:fillRef idx="3">
+            <a:schemeClr val="accent1"/>
+          </a:fillRef>
+          <a:effectRef idx="2">
+            <a:schemeClr val="accent1"/>
+          </a:effectRef>
+          <a:fontRef idx="minor">
+            <a:schemeClr val="lt1"/>
+          </a:fontRef>
+        </p:style>
+        <p:txBody>
+          <a:bodyPr rtlCol="0" anchor="ctr"/>
+          <a:lstStyle/>
+          <a:p>
+            <a:pPr algn="ctr"/>
+          </a:p>
+        </p:txBody>
+      </p:sp>
+      <p:sp>
+        <p:nvSpPr>
+          <p:cNvPr id="5" name="TextBox 4"/>
           <p:cNvSpPr txBox="1"/>
           <p:nvPr/>
         </p:nvSpPr>
         <p:spPr>
           <a:xfrm>
-            <a:off x="1005840" y="1828800"/>
-            <a:ext cx="10058400" cy="3657600"/>
+            <a:off x="822960" y="1508760"/>
+            <a:ext cx="10058400" cy="548640"/>
           </a:xfrm>
           <a:prstGeom prst="rect">
             <a:avLst/>
@@ -3560,67 +3897,182 @@
           </a:bodyPr>
           <a:lstStyle/>
           <a:p>
+            <a:pPr algn="l">
+              <a:defRPr sz="2200" b="0" i="0">
+                <a:solidFill>
+                  <a:srgbClr val="E8E8E8"/>
+                </a:solidFill>
+                <a:latin typeface="Calibri"/>
+              </a:defRPr>
+            </a:pPr>
+            <a:r>
+              <a:t>Finding similar clothing is slow, subjective, and tool-less.</a:t>
+            </a:r>
+          </a:p>
+        </p:txBody>
+      </p:sp>
+      <p:sp>
+        <p:nvSpPr>
+          <p:cNvPr id="6" name="TextBox 5"/>
+          <p:cNvSpPr txBox="1"/>
+          <p:nvPr/>
+        </p:nvSpPr>
+        <p:spPr>
+          <a:xfrm>
+            <a:off x="822960" y="2286000"/>
+            <a:ext cx="10058400" cy="3200400"/>
+          </a:xfrm>
+          <a:prstGeom prst="rect">
+            <a:avLst/>
+          </a:prstGeom>
+          <a:noFill/>
+        </p:spPr>
+        <p:txBody>
+          <a:bodyPr wrap="square">
+            <a:spAutoFit/>
+          </a:bodyPr>
+          <a:lstStyle/>
+          <a:p>
             <a:pPr>
               <a:spcAft>
-                <a:spcPts val="800"/>
+                <a:spcPts val="1400"/>
               </a:spcAft>
-              <a:defRPr sz="2200">
-                <a:solidFill>
-                  <a:srgbClr val="FFFFFF"/>
-                </a:solidFill>
-                <a:latin typeface="Calibri"/>
-              </a:defRPr>
-            </a:pPr>
-            <a:r>
-              <a:t>People struggle to find visually similar clothing in their wardrobe</a:t>
+              <a:defRPr sz="2000">
+                <a:solidFill>
+                  <a:srgbClr val="E8E8E8"/>
+                </a:solidFill>
+                <a:latin typeface="Calibri"/>
+              </a:defRPr>
+            </a:pPr>
+            <a:r>
+              <a:t>  Browsing a wardrobe manually relies on memory and guesswork</a:t>
             </a:r>
           </a:p>
           <a:p>
             <a:pPr>
               <a:spcAft>
-                <a:spcPts val="800"/>
+                <a:spcPts val="1400"/>
               </a:spcAft>
-              <a:defRPr sz="2200">
-                <a:solidFill>
-                  <a:srgbClr val="FFFFFF"/>
-                </a:solidFill>
-                <a:latin typeface="Calibri"/>
-              </a:defRPr>
-            </a:pPr>
-            <a:r>
-              <a:t>Keyword search doesn't work for visual style matching</a:t>
+              <a:defRPr sz="2000">
+                <a:solidFill>
+                  <a:srgbClr val="E8E8E8"/>
+                </a:solidFill>
+                <a:latin typeface="Calibri"/>
+              </a:defRPr>
+            </a:pPr>
+            <a:r>
+              <a:t>  Keyword search fails for visual style — "navy blue structured blazer" returns nothing useful</a:t>
             </a:r>
           </a:p>
           <a:p>
             <a:pPr>
               <a:spcAft>
-                <a:spcPts val="800"/>
+                <a:spcPts val="1400"/>
               </a:spcAft>
-              <a:defRPr sz="2200">
-                <a:solidFill>
-                  <a:srgbClr val="FFFFFF"/>
-                </a:solidFill>
-                <a:latin typeface="Calibri"/>
-              </a:defRPr>
-            </a:pPr>
-            <a:r>
-              <a:t>No easy way to say "find me something like this, but more formal"</a:t>
+              <a:defRPr sz="2000">
+                <a:solidFill>
+                  <a:srgbClr val="E8E8E8"/>
+                </a:solidFill>
+                <a:latin typeface="Calibri"/>
+              </a:defRPr>
+            </a:pPr>
+            <a:r>
+              <a:t>  No existing free tool answers: "what do I own that looks like this?"</a:t>
             </a:r>
           </a:p>
           <a:p>
             <a:pPr>
               <a:spcAft>
-                <a:spcPts val="800"/>
+                <a:spcPts val="1400"/>
               </a:spcAft>
-              <a:defRPr sz="2200">
-                <a:solidFill>
-                  <a:srgbClr val="FFFFFF"/>
-                </a:solidFill>
-                <a:latin typeface="Calibri"/>
-              </a:defRPr>
-            </a:pPr>
-            <a:r>
-              <a:t>Existing tools focus on shopping, not on understanding what you already own</a:t>
+              <a:defRPr sz="2000">
+                <a:solidFill>
+                  <a:srgbClr val="E8E8E8"/>
+                </a:solidFill>
+                <a:latin typeface="Calibri"/>
+              </a:defRPr>
+            </a:pPr>
+            <a:r>
+              <a:t>  And no tool lets you say: "similar to this, but more casual, no logos"</a:t>
+            </a:r>
+          </a:p>
+        </p:txBody>
+      </p:sp>
+      <p:sp>
+        <p:nvSpPr>
+          <p:cNvPr id="7" name="Rectangle 6"/>
+          <p:cNvSpPr/>
+          <p:nvPr/>
+        </p:nvSpPr>
+        <p:spPr>
+          <a:xfrm>
+            <a:off x="731520" y="5806440"/>
+            <a:ext cx="10698480" cy="685800"/>
+          </a:xfrm>
+          <a:prstGeom prst="rect">
+            <a:avLst/>
+          </a:prstGeom>
+          <a:solidFill>
+            <a:srgbClr val="1A1A1A"/>
+          </a:solidFill>
+          <a:ln>
+            <a:noFill/>
+          </a:ln>
+        </p:spPr>
+        <p:style>
+          <a:lnRef idx="1">
+            <a:schemeClr val="accent1"/>
+          </a:lnRef>
+          <a:fillRef idx="3">
+            <a:schemeClr val="accent1"/>
+          </a:fillRef>
+          <a:effectRef idx="2">
+            <a:schemeClr val="accent1"/>
+          </a:effectRef>
+          <a:fontRef idx="minor">
+            <a:schemeClr val="lt1"/>
+          </a:fontRef>
+        </p:style>
+        <p:txBody>
+          <a:bodyPr rtlCol="0" anchor="ctr"/>
+          <a:lstStyle/>
+          <a:p>
+            <a:pPr algn="ctr"/>
+          </a:p>
+        </p:txBody>
+      </p:sp>
+      <p:sp>
+        <p:nvSpPr>
+          <p:cNvPr id="8" name="TextBox 7"/>
+          <p:cNvSpPr txBox="1"/>
+          <p:nvPr/>
+        </p:nvSpPr>
+        <p:spPr>
+          <a:xfrm>
+            <a:off x="1005840" y="5879592"/>
+            <a:ext cx="10149840" cy="548640"/>
+          </a:xfrm>
+          <a:prstGeom prst="rect">
+            <a:avLst/>
+          </a:prstGeom>
+          <a:noFill/>
+        </p:spPr>
+        <p:txBody>
+          <a:bodyPr wrap="square">
+            <a:spAutoFit/>
+          </a:bodyPr>
+          <a:lstStyle/>
+          <a:p>
+            <a:pPr algn="ctr">
+              <a:defRPr sz="2200" b="1" i="0">
+                <a:solidFill>
+                  <a:srgbClr val="FF6B6B"/>
+                </a:solidFill>
+                <a:latin typeface="Calibri"/>
+              </a:defRPr>
+            </a:pPr>
+            <a:r>
+              <a:t>"Visual style can't be typed — it needs to be shown."</a:t>
             </a:r>
           </a:p>
         </p:txBody>
@@ -3639,7 +4091,7 @@
     <p:bg>
       <p:bgPr>
         <a:solidFill>
-          <a:srgbClr val="1A1A2E"/>
+          <a:srgbClr val="0F0F0F"/>
         </a:solidFill>
         <a:effectLst/>
       </p:bgPr>
@@ -3659,14 +4111,14 @@
         </p:nvSpPr>
         <p:spPr>
           <a:xfrm>
-            <a:off x="731520" y="731520"/>
-            <a:ext cx="73152" cy="548640"/>
+            <a:off x="0" y="0"/>
+            <a:ext cx="54864" cy="6858000"/>
           </a:xfrm>
           <a:prstGeom prst="rect">
             <a:avLst/>
           </a:prstGeom>
           <a:solidFill>
-            <a:srgbClr val="533CD0"/>
+            <a:srgbClr val="888899"/>
           </a:solidFill>
           <a:ln>
             <a:noFill/>
@@ -3696,14 +4148,57 @@
       </p:sp>
       <p:sp>
         <p:nvSpPr>
-          <p:cNvPr id="3" name="TextBox 2"/>
+          <p:cNvPr id="3" name="Rectangle 2"/>
+          <p:cNvSpPr/>
+          <p:nvPr/>
+        </p:nvSpPr>
+        <p:spPr>
+          <a:xfrm>
+            <a:off x="731520" y="658368"/>
+            <a:ext cx="1463040" cy="329184"/>
+          </a:xfrm>
+          <a:prstGeom prst="rect">
+            <a:avLst/>
+          </a:prstGeom>
+          <a:solidFill>
+            <a:srgbClr val="888899"/>
+          </a:solidFill>
+          <a:ln>
+            <a:noFill/>
+          </a:ln>
+        </p:spPr>
+        <p:style>
+          <a:lnRef idx="1">
+            <a:schemeClr val="accent1"/>
+          </a:lnRef>
+          <a:fillRef idx="3">
+            <a:schemeClr val="accent1"/>
+          </a:fillRef>
+          <a:effectRef idx="2">
+            <a:schemeClr val="accent1"/>
+          </a:effectRef>
+          <a:fontRef idx="minor">
+            <a:schemeClr val="lt1"/>
+          </a:fontRef>
+        </p:style>
+        <p:txBody>
+          <a:bodyPr rtlCol="0" anchor="ctr"/>
+          <a:lstStyle/>
+          <a:p>
+            <a:pPr algn="ctr"/>
+          </a:p>
+        </p:txBody>
+      </p:sp>
+      <p:sp>
+        <p:nvSpPr>
+          <p:cNvPr id="4" name="TextBox 3"/>
           <p:cNvSpPr txBox="1"/>
           <p:nvPr/>
         </p:nvSpPr>
         <p:spPr>
           <a:xfrm>
-            <a:off x="1005840" y="640080"/>
-            <a:ext cx="9144000" cy="731520"/>
+            <a:off x="749808" y="676656"/>
+            <a:ext cx="1426464" cy="292608"/>
           </a:xfrm>
           <a:prstGeom prst="rect">
             <a:avLst/>
@@ -3716,8 +4211,8 @@
           </a:bodyPr>
           <a:lstStyle/>
           <a:p>
-            <a:pPr algn="l">
-              <a:defRPr sz="3600" b="1">
+            <a:pPr algn="ctr">
+              <a:defRPr sz="1300" b="1" i="0">
                 <a:solidFill>
                   <a:srgbClr val="FFFFFF"/>
                 </a:solidFill>
@@ -3725,21 +4220,21 @@
               </a:defRPr>
             </a:pPr>
             <a:r>
-              <a:t>Proposed Solution</a:t>
-            </a:r>
-          </a:p>
-        </p:txBody>
-      </p:sp>
-      <p:sp>
-        <p:nvSpPr>
-          <p:cNvPr id="4" name="TextBox 3"/>
+              <a:t>STAGE 1</a:t>
+            </a:r>
+          </a:p>
+        </p:txBody>
+      </p:sp>
+      <p:sp>
+        <p:nvSpPr>
+          <p:cNvPr id="5" name="TextBox 4"/>
           <p:cNvSpPr txBox="1"/>
           <p:nvPr/>
         </p:nvSpPr>
         <p:spPr>
           <a:xfrm>
-            <a:off x="1005840" y="1645920"/>
-            <a:ext cx="10058400" cy="731520"/>
+            <a:off x="822960" y="502920"/>
+            <a:ext cx="9144000" cy="640080"/>
           </a:xfrm>
           <a:prstGeom prst="rect">
             <a:avLst/>
@@ -3753,33 +4248,72 @@
           <a:lstStyle/>
           <a:p>
             <a:pPr algn="l">
-              <a:defRPr sz="2000" b="0">
-                <a:solidFill>
-                  <a:srgbClr val="BBBBCC"/>
-                </a:solidFill>
-                <a:latin typeface="Calibri"/>
-              </a:defRPr>
-            </a:pPr>
-            <a:r>
-              <a:t>A retrieval-based system that uses visual embeddings to find similar clothing,</a:t>
-            </a:r>
-            <a:br/>
-            <a:r>
-              <a:t>then reranks results based on user style preferences.</a:t>
-            </a:r>
-          </a:p>
-        </p:txBody>
-      </p:sp>
-      <p:sp>
-        <p:nvSpPr>
-          <p:cNvPr id="5" name="TextBox 4"/>
+              <a:defRPr sz="3600" b="1" i="0">
+                <a:solidFill>
+                  <a:srgbClr val="FFFFFF"/>
+                </a:solidFill>
+                <a:latin typeface="Calibri"/>
+              </a:defRPr>
+            </a:pPr>
+            <a:r>
+              <a:t>Baseline: CLIP Retrieval</a:t>
+            </a:r>
+          </a:p>
+        </p:txBody>
+      </p:sp>
+      <p:sp>
+        <p:nvSpPr>
+          <p:cNvPr id="6" name="Rectangle 5"/>
+          <p:cNvSpPr/>
+          <p:nvPr/>
+        </p:nvSpPr>
+        <p:spPr>
+          <a:xfrm>
+            <a:off x="731520" y="1234440"/>
+            <a:ext cx="10698480" cy="36576"/>
+          </a:xfrm>
+          <a:prstGeom prst="rect">
+            <a:avLst/>
+          </a:prstGeom>
+          <a:solidFill>
+            <a:srgbClr val="888899"/>
+          </a:solidFill>
+          <a:ln>
+            <a:noFill/>
+          </a:ln>
+        </p:spPr>
+        <p:style>
+          <a:lnRef idx="1">
+            <a:schemeClr val="accent1"/>
+          </a:lnRef>
+          <a:fillRef idx="3">
+            <a:schemeClr val="accent1"/>
+          </a:fillRef>
+          <a:effectRef idx="2">
+            <a:schemeClr val="accent1"/>
+          </a:effectRef>
+          <a:fontRef idx="minor">
+            <a:schemeClr val="lt1"/>
+          </a:fontRef>
+        </p:style>
+        <p:txBody>
+          <a:bodyPr rtlCol="0" anchor="ctr"/>
+          <a:lstStyle/>
+          <a:p>
+            <a:pPr algn="ctr"/>
+          </a:p>
+        </p:txBody>
+      </p:sp>
+      <p:sp>
+        <p:nvSpPr>
+          <p:cNvPr id="7" name="TextBox 6"/>
           <p:cNvSpPr txBox="1"/>
           <p:nvPr/>
         </p:nvSpPr>
         <p:spPr>
           <a:xfrm>
-            <a:off x="1005840" y="2926080"/>
-            <a:ext cx="10058400" cy="3657600"/>
+            <a:off x="822960" y="1463040"/>
+            <a:ext cx="10058400" cy="502920"/>
           </a:xfrm>
           <a:prstGeom prst="rect">
             <a:avLst/>
@@ -3792,99 +4326,427 @@
           </a:bodyPr>
           <a:lstStyle/>
           <a:p>
+            <a:pPr algn="l">
+              <a:defRPr sz="2000" b="0" i="1">
+                <a:solidFill>
+                  <a:srgbClr val="888899"/>
+                </a:solidFill>
+                <a:latin typeface="Calibri"/>
+              </a:defRPr>
+            </a:pPr>
+            <a:r>
+              <a:t>"I started with a basic CLIP-based retrieval system."</a:t>
+            </a:r>
+          </a:p>
+        </p:txBody>
+      </p:sp>
+      <p:sp>
+        <p:nvSpPr>
+          <p:cNvPr id="8" name="Rectangle 7"/>
+          <p:cNvSpPr/>
+          <p:nvPr/>
+        </p:nvSpPr>
+        <p:spPr>
+          <a:xfrm>
+            <a:off x="822960" y="2194560"/>
+            <a:ext cx="4937760" cy="2743200"/>
+          </a:xfrm>
+          <a:prstGeom prst="rect">
+            <a:avLst/>
+          </a:prstGeom>
+          <a:solidFill>
+            <a:srgbClr val="1A1A1A"/>
+          </a:solidFill>
+          <a:ln>
+            <a:noFill/>
+          </a:ln>
+        </p:spPr>
+        <p:style>
+          <a:lnRef idx="1">
+            <a:schemeClr val="accent1"/>
+          </a:lnRef>
+          <a:fillRef idx="3">
+            <a:schemeClr val="accent1"/>
+          </a:fillRef>
+          <a:effectRef idx="2">
+            <a:schemeClr val="accent1"/>
+          </a:effectRef>
+          <a:fontRef idx="minor">
+            <a:schemeClr val="lt1"/>
+          </a:fontRef>
+        </p:style>
+        <p:txBody>
+          <a:bodyPr rtlCol="0" anchor="ctr"/>
+          <a:lstStyle/>
+          <a:p>
+            <a:pPr algn="ctr"/>
+          </a:p>
+        </p:txBody>
+      </p:sp>
+      <p:sp>
+        <p:nvSpPr>
+          <p:cNvPr id="9" name="TextBox 8"/>
+          <p:cNvSpPr txBox="1"/>
+          <p:nvPr/>
+        </p:nvSpPr>
+        <p:spPr>
+          <a:xfrm>
+            <a:off x="1005840" y="2331720"/>
+            <a:ext cx="4572000" cy="411480"/>
+          </a:xfrm>
+          <a:prstGeom prst="rect">
+            <a:avLst/>
+          </a:prstGeom>
+          <a:noFill/>
+        </p:spPr>
+        <p:txBody>
+          <a:bodyPr wrap="square">
+            <a:spAutoFit/>
+          </a:bodyPr>
+          <a:lstStyle/>
+          <a:p>
+            <a:pPr algn="l">
+              <a:defRPr sz="1700" b="1" i="0">
+                <a:solidFill>
+                  <a:srgbClr val="00C9A7"/>
+                </a:solidFill>
+                <a:latin typeface="Calibri"/>
+              </a:defRPr>
+            </a:pPr>
+            <a:r>
+              <a:t>What it did</a:t>
+            </a:r>
+          </a:p>
+        </p:txBody>
+      </p:sp>
+      <p:sp>
+        <p:nvSpPr>
+          <p:cNvPr id="10" name="TextBox 9"/>
+          <p:cNvSpPr txBox="1"/>
+          <p:nvPr/>
+        </p:nvSpPr>
+        <p:spPr>
+          <a:xfrm>
+            <a:off x="1005840" y="2834640"/>
+            <a:ext cx="4572000" cy="2011680"/>
+          </a:xfrm>
+          <a:prstGeom prst="rect">
+            <a:avLst/>
+          </a:prstGeom>
+          <a:noFill/>
+        </p:spPr>
+        <p:txBody>
+          <a:bodyPr wrap="square">
+            <a:spAutoFit/>
+          </a:bodyPr>
+          <a:lstStyle/>
+          <a:p>
             <a:pPr>
               <a:spcAft>
-                <a:spcPts val="800"/>
+                <a:spcPts val="1000"/>
               </a:spcAft>
-              <a:defRPr sz="2000">
-                <a:solidFill>
-                  <a:srgbClr val="FFFFFF"/>
-                </a:solidFill>
-                <a:latin typeface="Calibri"/>
-              </a:defRPr>
-            </a:pPr>
-            <a:r>
-              <a:t>Upload a clothing image to a web app</a:t>
+              <a:defRPr sz="1600">
+                <a:solidFill>
+                  <a:srgbClr val="E8E8E8"/>
+                </a:solidFill>
+                <a:latin typeface="Calibri"/>
+              </a:defRPr>
+            </a:pPr>
+            <a:r>
+              <a:t>  Upload image → get 5 similar items</a:t>
             </a:r>
           </a:p>
           <a:p>
             <a:pPr>
               <a:spcAft>
-                <a:spcPts val="800"/>
+                <a:spcPts val="1000"/>
               </a:spcAft>
-              <a:defRPr sz="2000">
-                <a:solidFill>
-                  <a:srgbClr val="FFFFFF"/>
-                </a:solidFill>
-                <a:latin typeface="Calibri"/>
-              </a:defRPr>
-            </a:pPr>
-            <a:r>
-              <a:t>FashionCLIP encodes the image into a 512-dimensional embedding</a:t>
+              <a:defRPr sz="1600">
+                <a:solidFill>
+                  <a:srgbClr val="E8E8E8"/>
+                </a:solidFill>
+                <a:latin typeface="Calibri"/>
+              </a:defRPr>
+            </a:pPr>
+            <a:r>
+              <a:t>  CLIP encodes images into 512-dim embeddings</a:t>
             </a:r>
           </a:p>
           <a:p>
             <a:pPr>
               <a:spcAft>
-                <a:spcPts val="800"/>
+                <a:spcPts val="1000"/>
               </a:spcAft>
-              <a:defRPr sz="2000">
-                <a:solidFill>
-                  <a:srgbClr val="FFFFFF"/>
-                </a:solidFill>
-                <a:latin typeface="Calibri"/>
-              </a:defRPr>
-            </a:pPr>
-            <a:r>
-              <a:t>FAISS searches pre-computed catalog embeddings for nearest neighbors</a:t>
+              <a:defRPr sz="1600">
+                <a:solidFill>
+                  <a:srgbClr val="E8E8E8"/>
+                </a:solidFill>
+                <a:latin typeface="Calibri"/>
+              </a:defRPr>
+            </a:pPr>
+            <a:r>
+              <a:t>  Cosine similarity over ~400 catalog images</a:t>
             </a:r>
           </a:p>
           <a:p>
             <a:pPr>
               <a:spcAft>
-                <a:spcPts val="800"/>
+                <a:spcPts val="1000"/>
               </a:spcAft>
-              <a:defRPr sz="2000">
-                <a:solidFill>
-                  <a:srgbClr val="FFFFFF"/>
-                </a:solidFill>
-                <a:latin typeface="Calibri"/>
-              </a:defRPr>
-            </a:pPr>
-            <a:r>
-              <a:t>Top-5 most similar items are returned</a:t>
-            </a:r>
-          </a:p>
+              <a:defRPr sz="1600">
+                <a:solidFill>
+                  <a:srgbClr val="E8E8E8"/>
+                </a:solidFill>
+                <a:latin typeface="Calibri"/>
+              </a:defRPr>
+            </a:pPr>
+            <a:r>
+              <a:t>  Live Streamlit web demo</a:t>
+            </a:r>
+          </a:p>
+        </p:txBody>
+      </p:sp>
+      <p:sp>
+        <p:nvSpPr>
+          <p:cNvPr id="11" name="Rectangle 10"/>
+          <p:cNvSpPr/>
+          <p:nvPr/>
+        </p:nvSpPr>
+        <p:spPr>
+          <a:xfrm>
+            <a:off x="6400800" y="2194560"/>
+            <a:ext cx="4937760" cy="2743200"/>
+          </a:xfrm>
+          <a:prstGeom prst="rect">
+            <a:avLst/>
+          </a:prstGeom>
+          <a:solidFill>
+            <a:srgbClr val="1A1A1A"/>
+          </a:solidFill>
+          <a:ln>
+            <a:noFill/>
+          </a:ln>
+        </p:spPr>
+        <p:style>
+          <a:lnRef idx="1">
+            <a:schemeClr val="accent1"/>
+          </a:lnRef>
+          <a:fillRef idx="3">
+            <a:schemeClr val="accent1"/>
+          </a:fillRef>
+          <a:effectRef idx="2">
+            <a:schemeClr val="accent1"/>
+          </a:effectRef>
+          <a:fontRef idx="minor">
+            <a:schemeClr val="lt1"/>
+          </a:fontRef>
+        </p:style>
+        <p:txBody>
+          <a:bodyPr rtlCol="0" anchor="ctr"/>
+          <a:lstStyle/>
+          <a:p>
+            <a:pPr algn="ctr"/>
+          </a:p>
+        </p:txBody>
+      </p:sp>
+      <p:sp>
+        <p:nvSpPr>
+          <p:cNvPr id="12" name="TextBox 11"/>
+          <p:cNvSpPr txBox="1"/>
+          <p:nvPr/>
+        </p:nvSpPr>
+        <p:spPr>
+          <a:xfrm>
+            <a:off x="6583680" y="2331720"/>
+            <a:ext cx="4572000" cy="411480"/>
+          </a:xfrm>
+          <a:prstGeom prst="rect">
+            <a:avLst/>
+          </a:prstGeom>
+          <a:noFill/>
+        </p:spPr>
+        <p:txBody>
+          <a:bodyPr wrap="square">
+            <a:spAutoFit/>
+          </a:bodyPr>
+          <a:lstStyle/>
+          <a:p>
+            <a:pPr algn="l">
+              <a:defRPr sz="1700" b="1" i="0">
+                <a:solidFill>
+                  <a:srgbClr val="FF6B6B"/>
+                </a:solidFill>
+                <a:latin typeface="Calibri"/>
+              </a:defRPr>
+            </a:pPr>
+            <a:r>
+              <a:t>Where it fell short</a:t>
+            </a:r>
+          </a:p>
+        </p:txBody>
+      </p:sp>
+      <p:sp>
+        <p:nvSpPr>
+          <p:cNvPr id="13" name="TextBox 12"/>
+          <p:cNvSpPr txBox="1"/>
+          <p:nvPr/>
+        </p:nvSpPr>
+        <p:spPr>
+          <a:xfrm>
+            <a:off x="6583680" y="2834640"/>
+            <a:ext cx="4572000" cy="2011680"/>
+          </a:xfrm>
+          <a:prstGeom prst="rect">
+            <a:avLst/>
+          </a:prstGeom>
+          <a:noFill/>
+        </p:spPr>
+        <p:txBody>
+          <a:bodyPr wrap="square">
+            <a:spAutoFit/>
+          </a:bodyPr>
+          <a:lstStyle/>
           <a:p>
             <a:pPr>
               <a:spcAft>
-                <a:spcPts val="800"/>
+                <a:spcPts val="1000"/>
               </a:spcAft>
-              <a:defRPr sz="2000">
-                <a:solidFill>
-                  <a:srgbClr val="FFFFFF"/>
-                </a:solidFill>
-                <a:latin typeface="Calibri"/>
-              </a:defRPr>
-            </a:pPr>
-            <a:r>
-              <a:t>User selects style preferences (formal, casual, avoid hoods, etc.)</a:t>
+              <a:defRPr sz="1600">
+                <a:solidFill>
+                  <a:srgbClr val="E8E8E8"/>
+                </a:solidFill>
+                <a:latin typeface="Calibri"/>
+              </a:defRPr>
+            </a:pPr>
+            <a:r>
+              <a:t>  CLIP trained on generic internet data</a:t>
             </a:r>
           </a:p>
           <a:p>
             <a:pPr>
               <a:spcAft>
-                <a:spcPts val="800"/>
+                <a:spcPts val="1000"/>
               </a:spcAft>
-              <a:defRPr sz="2000">
-                <a:solidFill>
-                  <a:srgbClr val="FFFFFF"/>
-                </a:solidFill>
-                <a:latin typeface="Calibri"/>
-              </a:defRPr>
-            </a:pPr>
-            <a:r>
-              <a:t>Results are reranked using text-based goal bonuses and avoid penalties</a:t>
+              <a:defRPr sz="1600">
+                <a:solidFill>
+                  <a:srgbClr val="E8E8E8"/>
+                </a:solidFill>
+                <a:latin typeface="Calibri"/>
+              </a:defRPr>
+            </a:pPr>
+            <a:r>
+              <a:t>  Struggled with specific garments</a:t>
+            </a:r>
+          </a:p>
+          <a:p>
+            <a:pPr>
+              <a:spcAft>
+                <a:spcPts val="1000"/>
+              </a:spcAft>
+              <a:defRPr sz="1600">
+                <a:solidFill>
+                  <a:srgbClr val="E8E8E8"/>
+                </a:solidFill>
+                <a:latin typeface="Calibri"/>
+              </a:defRPr>
+            </a:pPr>
+            <a:r>
+              <a:t>  Puffer jackets, cardigans → poor results</a:t>
+            </a:r>
+          </a:p>
+          <a:p>
+            <a:pPr>
+              <a:spcAft>
+                <a:spcPts val="1000"/>
+              </a:spcAft>
+              <a:defRPr sz="1600">
+                <a:solidFill>
+                  <a:srgbClr val="E8E8E8"/>
+                </a:solidFill>
+                <a:latin typeface="Calibri"/>
+              </a:defRPr>
+            </a:pPr>
+            <a:r>
+              <a:t>  No way to guide or filter results</a:t>
+            </a:r>
+          </a:p>
+        </p:txBody>
+      </p:sp>
+      <p:sp>
+        <p:nvSpPr>
+          <p:cNvPr id="14" name="Rectangle 13"/>
+          <p:cNvSpPr/>
+          <p:nvPr/>
+        </p:nvSpPr>
+        <p:spPr>
+          <a:xfrm>
+            <a:off x="731520" y="5806440"/>
+            <a:ext cx="10698480" cy="685800"/>
+          </a:xfrm>
+          <a:prstGeom prst="rect">
+            <a:avLst/>
+          </a:prstGeom>
+          <a:solidFill>
+            <a:srgbClr val="1A1A1A"/>
+          </a:solidFill>
+          <a:ln>
+            <a:noFill/>
+          </a:ln>
+        </p:spPr>
+        <p:style>
+          <a:lnRef idx="1">
+            <a:schemeClr val="accent1"/>
+          </a:lnRef>
+          <a:fillRef idx="3">
+            <a:schemeClr val="accent1"/>
+          </a:fillRef>
+          <a:effectRef idx="2">
+            <a:schemeClr val="accent1"/>
+          </a:effectRef>
+          <a:fontRef idx="minor">
+            <a:schemeClr val="lt1"/>
+          </a:fontRef>
+        </p:style>
+        <p:txBody>
+          <a:bodyPr rtlCol="0" anchor="ctr"/>
+          <a:lstStyle/>
+          <a:p>
+            <a:pPr algn="ctr"/>
+          </a:p>
+        </p:txBody>
+      </p:sp>
+      <p:sp>
+        <p:nvSpPr>
+          <p:cNvPr id="15" name="TextBox 14"/>
+          <p:cNvSpPr txBox="1"/>
+          <p:nvPr/>
+        </p:nvSpPr>
+        <p:spPr>
+          <a:xfrm>
+            <a:off x="1005840" y="5879592"/>
+            <a:ext cx="10149840" cy="548640"/>
+          </a:xfrm>
+          <a:prstGeom prst="rect">
+            <a:avLst/>
+          </a:prstGeom>
+          <a:noFill/>
+        </p:spPr>
+        <p:txBody>
+          <a:bodyPr wrap="square">
+            <a:spAutoFit/>
+          </a:bodyPr>
+          <a:lstStyle/>
+          <a:p>
+            <a:pPr algn="ctr">
+              <a:defRPr sz="2200" b="1" i="0">
+                <a:solidFill>
+                  <a:srgbClr val="FFD166"/>
+                </a:solidFill>
+                <a:latin typeface="Calibri"/>
+              </a:defRPr>
+            </a:pPr>
+            <a:r>
+              <a:t>"It worked — but it wasn't fashion-aware."</a:t>
             </a:r>
           </a:p>
         </p:txBody>
@@ -3903,7 +4765,7 @@
     <p:bg>
       <p:bgPr>
         <a:solidFill>
-          <a:srgbClr val="1A1A2E"/>
+          <a:srgbClr val="0F0F0F"/>
         </a:solidFill>
         <a:effectLst/>
       </p:bgPr>
@@ -3923,14 +4785,14 @@
         </p:nvSpPr>
         <p:spPr>
           <a:xfrm>
-            <a:off x="731520" y="731520"/>
-            <a:ext cx="73152" cy="548640"/>
+            <a:off x="0" y="0"/>
+            <a:ext cx="54864" cy="6858000"/>
           </a:xfrm>
           <a:prstGeom prst="rect">
             <a:avLst/>
           </a:prstGeom>
           <a:solidFill>
-            <a:srgbClr val="533CD0"/>
+            <a:srgbClr val="6C63FF"/>
           </a:solidFill>
           <a:ln>
             <a:noFill/>
@@ -3960,56 +4822,20 @@
       </p:sp>
       <p:sp>
         <p:nvSpPr>
-          <p:cNvPr id="3" name="TextBox 2"/>
-          <p:cNvSpPr txBox="1"/>
-          <p:nvPr/>
-        </p:nvSpPr>
-        <p:spPr>
-          <a:xfrm>
-            <a:off x="1005840" y="640080"/>
-            <a:ext cx="9144000" cy="731520"/>
-          </a:xfrm>
-          <a:prstGeom prst="rect">
-            <a:avLst/>
-          </a:prstGeom>
-          <a:noFill/>
-        </p:spPr>
-        <p:txBody>
-          <a:bodyPr wrap="square">
-            <a:spAutoFit/>
-          </a:bodyPr>
-          <a:lstStyle/>
-          <a:p>
-            <a:pPr algn="l">
-              <a:defRPr sz="3600" b="1">
-                <a:solidFill>
-                  <a:srgbClr val="FFFFFF"/>
-                </a:solidFill>
-                <a:latin typeface="Calibri"/>
-              </a:defRPr>
-            </a:pPr>
-            <a:r>
-              <a:t>Architecture</a:t>
-            </a:r>
-          </a:p>
-        </p:txBody>
-      </p:sp>
-      <p:sp>
-        <p:nvSpPr>
-          <p:cNvPr id="4" name="Rectangle 3"/>
+          <p:cNvPr id="3" name="Rectangle 2"/>
           <p:cNvSpPr/>
           <p:nvPr/>
         </p:nvSpPr>
         <p:spPr>
           <a:xfrm>
-            <a:off x="822960" y="2926080"/>
-            <a:ext cx="1828800" cy="914400"/>
+            <a:off x="731520" y="658368"/>
+            <a:ext cx="1463040" cy="329184"/>
           </a:xfrm>
           <a:prstGeom prst="rect">
             <a:avLst/>
           </a:prstGeom>
           <a:solidFill>
-            <a:srgbClr val="533CD0"/>
+            <a:srgbClr val="6C63FF"/>
           </a:solidFill>
           <a:ln>
             <a:noFill/>
@@ -4030,36 +4856,23 @@
           </a:fontRef>
         </p:style>
         <p:txBody>
-          <a:bodyPr rtlCol="0" anchor="ctr" wrap="square"/>
-          <a:lstStyle/>
-          <a:p>
-            <a:pPr algn="ctr">
-              <a:spcBef>
-                <a:spcPts val="1400"/>
-              </a:spcBef>
-              <a:defRPr sz="1600" b="1">
-                <a:solidFill>
-                  <a:srgbClr val="FFFFFF"/>
-                </a:solidFill>
-                <a:latin typeface="Calibri"/>
-              </a:defRPr>
-            </a:pPr>
-            <a:r>
-              <a:t>Upload Image</a:t>
-            </a:r>
-          </a:p>
-        </p:txBody>
-      </p:sp>
-      <p:sp>
-        <p:nvSpPr>
-          <p:cNvPr id="5" name="TextBox 4"/>
+          <a:bodyPr rtlCol="0" anchor="ctr"/>
+          <a:lstStyle/>
+          <a:p>
+            <a:pPr algn="ctr"/>
+          </a:p>
+        </p:txBody>
+      </p:sp>
+      <p:sp>
+        <p:nvSpPr>
+          <p:cNvPr id="4" name="TextBox 3"/>
           <p:cNvSpPr txBox="1"/>
           <p:nvPr/>
         </p:nvSpPr>
         <p:spPr>
           <a:xfrm>
-            <a:off x="2697480" y="3108960"/>
-            <a:ext cx="365760" cy="548640"/>
+            <a:off x="749808" y="676656"/>
+            <a:ext cx="1426464" cy="292608"/>
           </a:xfrm>
           <a:prstGeom prst="rect">
             <a:avLst/>
@@ -4073,15 +4886,51 @@
           <a:lstStyle/>
           <a:p>
             <a:pPr algn="ctr">
-              <a:defRPr sz="2800" b="0">
-                <a:solidFill>
-                  <a:srgbClr val="7C6BE6"/>
-                </a:solidFill>
-                <a:latin typeface="Calibri"/>
-              </a:defRPr>
-            </a:pPr>
-            <a:r>
-              <a:t>→</a:t>
+              <a:defRPr sz="1300" b="1" i="0">
+                <a:solidFill>
+                  <a:srgbClr val="FFFFFF"/>
+                </a:solidFill>
+                <a:latin typeface="Calibri"/>
+              </a:defRPr>
+            </a:pPr>
+            <a:r>
+              <a:t>STAGE 2</a:t>
+            </a:r>
+          </a:p>
+        </p:txBody>
+      </p:sp>
+      <p:sp>
+        <p:nvSpPr>
+          <p:cNvPr id="5" name="TextBox 4"/>
+          <p:cNvSpPr txBox="1"/>
+          <p:nvPr/>
+        </p:nvSpPr>
+        <p:spPr>
+          <a:xfrm>
+            <a:off x="822960" y="502920"/>
+            <a:ext cx="9144000" cy="640080"/>
+          </a:xfrm>
+          <a:prstGeom prst="rect">
+            <a:avLst/>
+          </a:prstGeom>
+          <a:noFill/>
+        </p:spPr>
+        <p:txBody>
+          <a:bodyPr wrap="square">
+            <a:spAutoFit/>
+          </a:bodyPr>
+          <a:lstStyle/>
+          <a:p>
+            <a:pPr algn="l">
+              <a:defRPr sz="3600" b="1" i="0">
+                <a:solidFill>
+                  <a:srgbClr val="FFFFFF"/>
+                </a:solidFill>
+                <a:latin typeface="Calibri"/>
+              </a:defRPr>
+            </a:pPr>
+            <a:r>
+              <a:t>Adding User Preferences</a:t>
             </a:r>
           </a:p>
         </p:txBody>
@@ -4094,14 +4943,14 @@
         </p:nvSpPr>
         <p:spPr>
           <a:xfrm>
-            <a:off x="3108960" y="2926080"/>
-            <a:ext cx="1828800" cy="914400"/>
+            <a:off x="731520" y="1234440"/>
+            <a:ext cx="10698480" cy="36576"/>
           </a:xfrm>
           <a:prstGeom prst="rect">
             <a:avLst/>
           </a:prstGeom>
           <a:solidFill>
-            <a:srgbClr val="3A508F"/>
+            <a:srgbClr val="6C63FF"/>
           </a:solidFill>
           <a:ln>
             <a:noFill/>
@@ -4122,23 +4971,10 @@
           </a:fontRef>
         </p:style>
         <p:txBody>
-          <a:bodyPr rtlCol="0" anchor="ctr" wrap="square"/>
-          <a:lstStyle/>
-          <a:p>
-            <a:pPr algn="ctr">
-              <a:spcBef>
-                <a:spcPts val="1400"/>
-              </a:spcBef>
-              <a:defRPr sz="1600" b="1">
-                <a:solidFill>
-                  <a:srgbClr val="FFFFFF"/>
-                </a:solidFill>
-                <a:latin typeface="Calibri"/>
-              </a:defRPr>
-            </a:pPr>
-            <a:r>
-              <a:t>FashionCLIP Encoder</a:t>
-            </a:r>
+          <a:bodyPr rtlCol="0" anchor="ctr"/>
+          <a:lstStyle/>
+          <a:p>
+            <a:pPr algn="ctr"/>
           </a:p>
         </p:txBody>
       </p:sp>
@@ -4150,8 +4986,8 @@
         </p:nvSpPr>
         <p:spPr>
           <a:xfrm>
-            <a:off x="4983480" y="3108960"/>
-            <a:ext cx="365760" cy="548640"/>
+            <a:off x="822960" y="1463040"/>
+            <a:ext cx="10058400" cy="502920"/>
           </a:xfrm>
           <a:prstGeom prst="rect">
             <a:avLst/>
@@ -4164,16 +5000,16 @@
           </a:bodyPr>
           <a:lstStyle/>
           <a:p>
-            <a:pPr algn="ctr">
-              <a:defRPr sz="2800" b="0">
-                <a:solidFill>
-                  <a:srgbClr val="7C6BE6"/>
-                </a:solidFill>
-                <a:latin typeface="Calibri"/>
-              </a:defRPr>
-            </a:pPr>
-            <a:r>
-              <a:t>→</a:t>
+            <a:pPr algn="l">
+              <a:defRPr sz="2000" b="0" i="1">
+                <a:solidFill>
+                  <a:srgbClr val="888899"/>
+                </a:solidFill>
+                <a:latin typeface="Calibri"/>
+              </a:defRPr>
+            </a:pPr>
+            <a:r>
+              <a:t>"I added user preferences to make results controllable."</a:t>
             </a:r>
           </a:p>
         </p:txBody>
@@ -4186,14 +5022,14 @@
         </p:nvSpPr>
         <p:spPr>
           <a:xfrm>
-            <a:off x="5394960" y="2926080"/>
-            <a:ext cx="1828800" cy="914400"/>
+            <a:off x="822960" y="2194560"/>
+            <a:ext cx="10515600" cy="731520"/>
           </a:xfrm>
           <a:prstGeom prst="rect">
             <a:avLst/>
           </a:prstGeom>
           <a:solidFill>
-            <a:srgbClr val="3A508F"/>
+            <a:srgbClr val="1A1A1A"/>
           </a:solidFill>
           <a:ln>
             <a:noFill/>
@@ -4214,23 +5050,10 @@
           </a:fontRef>
         </p:style>
         <p:txBody>
-          <a:bodyPr rtlCol="0" anchor="ctr" wrap="square"/>
-          <a:lstStyle/>
-          <a:p>
-            <a:pPr algn="ctr">
-              <a:spcBef>
-                <a:spcPts val="1400"/>
-              </a:spcBef>
-              <a:defRPr sz="1600" b="1">
-                <a:solidFill>
-                  <a:srgbClr val="FFFFFF"/>
-                </a:solidFill>
-                <a:latin typeface="Calibri"/>
-              </a:defRPr>
-            </a:pPr>
-            <a:r>
-              <a:t>FAISS Index Search</a:t>
-            </a:r>
+          <a:bodyPr rtlCol="0" anchor="ctr"/>
+          <a:lstStyle/>
+          <a:p>
+            <a:pPr algn="ctr"/>
           </a:p>
         </p:txBody>
       </p:sp>
@@ -4242,8 +5065,8 @@
         </p:nvSpPr>
         <p:spPr>
           <a:xfrm>
-            <a:off x="7269480" y="3108960"/>
-            <a:ext cx="365760" cy="548640"/>
+            <a:off x="914400" y="2286000"/>
+            <a:ext cx="10332720" cy="548640"/>
           </a:xfrm>
           <a:prstGeom prst="rect">
             <a:avLst/>
@@ -4257,35 +5080,209 @@
           <a:lstStyle/>
           <a:p>
             <a:pPr algn="ctr">
-              <a:defRPr sz="2800" b="0">
-                <a:solidFill>
-                  <a:srgbClr val="7C6BE6"/>
-                </a:solidFill>
-                <a:latin typeface="Calibri"/>
-              </a:defRPr>
-            </a:pPr>
-            <a:r>
-              <a:t>→</a:t>
-            </a:r>
-          </a:p>
-        </p:txBody>
-      </p:sp>
-      <p:sp>
-        <p:nvSpPr>
-          <p:cNvPr id="10" name="Rectangle 9"/>
+              <a:defRPr sz="2000" b="1" i="0">
+                <a:solidFill>
+                  <a:srgbClr val="00C9A7"/>
+                </a:solidFill>
+                <a:latin typeface="Consolas"/>
+              </a:defRPr>
+            </a:pPr>
+            <a:r>
+              <a:t>final_score  =  base_score  +  0.15 × goal_bonus  −  0.15 × avoid_penalty</a:t>
+            </a:r>
+          </a:p>
+        </p:txBody>
+      </p:sp>
+      <p:sp>
+        <p:nvSpPr>
+          <p:cNvPr id="10" name="TextBox 9"/>
+          <p:cNvSpPr txBox="1"/>
+          <p:nvPr/>
+        </p:nvSpPr>
+        <p:spPr>
+          <a:xfrm>
+            <a:off x="822960" y="3200400"/>
+            <a:ext cx="5029200" cy="2286000"/>
+          </a:xfrm>
+          <a:prstGeom prst="rect">
+            <a:avLst/>
+          </a:prstGeom>
+          <a:noFill/>
+        </p:spPr>
+        <p:txBody>
+          <a:bodyPr wrap="square">
+            <a:spAutoFit/>
+          </a:bodyPr>
+          <a:lstStyle/>
+          <a:p>
+            <a:pPr>
+              <a:spcAft>
+                <a:spcPts val="1000"/>
+              </a:spcAft>
+              <a:defRPr sz="1700">
+                <a:solidFill>
+                  <a:srgbClr val="E8E8E8"/>
+                </a:solidFill>
+                <a:latin typeface="Calibri"/>
+              </a:defRPr>
+            </a:pPr>
+            <a:r>
+              <a:t>  Style controls: formal / casual / minimal / sporty</a:t>
+            </a:r>
+          </a:p>
+          <a:p>
+            <a:pPr>
+              <a:spcAft>
+                <a:spcPts val="1000"/>
+              </a:spcAft>
+              <a:defRPr sz="1700">
+                <a:solidFill>
+                  <a:srgbClr val="E8E8E8"/>
+                </a:solidFill>
+                <a:latin typeface="Calibri"/>
+              </a:defRPr>
+            </a:pPr>
+            <a:r>
+              <a:t>  Fit preference: slim, regular, relaxed, oversized</a:t>
+            </a:r>
+          </a:p>
+          <a:p>
+            <a:pPr>
+              <a:spcAft>
+                <a:spcPts val="1000"/>
+              </a:spcAft>
+              <a:defRPr sz="1700">
+                <a:solidFill>
+                  <a:srgbClr val="E8E8E8"/>
+                </a:solidFill>
+                <a:latin typeface="Calibri"/>
+              </a:defRPr>
+            </a:pPr>
+            <a:r>
+              <a:t>  Avoid features: hoods, logos, cropped, skinny fit</a:t>
+            </a:r>
+          </a:p>
+          <a:p>
+            <a:pPr>
+              <a:spcAft>
+                <a:spcPts val="1000"/>
+              </a:spcAft>
+              <a:defRPr sz="1700">
+                <a:solidFill>
+                  <a:srgbClr val="E8E8E8"/>
+                </a:solidFill>
+                <a:latin typeface="Calibri"/>
+              </a:defRPr>
+            </a:pPr>
+            <a:r>
+              <a:t>  Free-text input: "more formal, avoid skinny fit"</a:t>
+            </a:r>
+          </a:p>
+        </p:txBody>
+      </p:sp>
+      <p:sp>
+        <p:nvSpPr>
+          <p:cNvPr id="11" name="TextBox 10"/>
+          <p:cNvSpPr txBox="1"/>
+          <p:nvPr/>
+        </p:nvSpPr>
+        <p:spPr>
+          <a:xfrm>
+            <a:off x="6400800" y="3200400"/>
+            <a:ext cx="5029200" cy="2286000"/>
+          </a:xfrm>
+          <a:prstGeom prst="rect">
+            <a:avLst/>
+          </a:prstGeom>
+          <a:noFill/>
+        </p:spPr>
+        <p:txBody>
+          <a:bodyPr wrap="square">
+            <a:spAutoFit/>
+          </a:bodyPr>
+          <a:lstStyle/>
+          <a:p>
+            <a:pPr>
+              <a:spcAft>
+                <a:spcPts val="1000"/>
+              </a:spcAft>
+              <a:defRPr sz="1700">
+                <a:solidFill>
+                  <a:srgbClr val="E8E8E8"/>
+                </a:solidFill>
+                <a:latin typeface="Calibri"/>
+              </a:defRPr>
+            </a:pPr>
+            <a:r>
+              <a:t>  Text prompts encoded with CLIP (e.g. "a formal outfit")</a:t>
+            </a:r>
+          </a:p>
+          <a:p>
+            <a:pPr>
+              <a:spcAft>
+                <a:spcPts val="1000"/>
+              </a:spcAft>
+              <a:defRPr sz="1700">
+                <a:solidFill>
+                  <a:srgbClr val="E8E8E8"/>
+                </a:solidFill>
+                <a:latin typeface="Calibri"/>
+              </a:defRPr>
+            </a:pPr>
+            <a:r>
+              <a:t>  Each result gets a goal bonus and avoid penalty</a:t>
+            </a:r>
+          </a:p>
+          <a:p>
+            <a:pPr>
+              <a:spcAft>
+                <a:spcPts val="1000"/>
+              </a:spcAft>
+              <a:defRPr sz="1700">
+                <a:solidFill>
+                  <a:srgbClr val="E8E8E8"/>
+                </a:solidFill>
+                <a:latin typeface="Calibri"/>
+              </a:defRPr>
+            </a:pPr>
+            <a:r>
+              <a:t>  Results re-sorted by final score</a:t>
+            </a:r>
+          </a:p>
+          <a:p>
+            <a:pPr>
+              <a:spcAft>
+                <a:spcPts val="1000"/>
+              </a:spcAft>
+              <a:defRPr sz="1700">
+                <a:solidFill>
+                  <a:srgbClr val="E8E8E8"/>
+                </a:solidFill>
+                <a:latin typeface="Calibri"/>
+              </a:defRPr>
+            </a:pPr>
+            <a:r>
+              <a:t>  Both baseline and reranked results shown side by side</a:t>
+            </a:r>
+          </a:p>
+        </p:txBody>
+      </p:sp>
+      <p:sp>
+        <p:nvSpPr>
+          <p:cNvPr id="12" name="Rectangle 11"/>
           <p:cNvSpPr/>
           <p:nvPr/>
         </p:nvSpPr>
         <p:spPr>
           <a:xfrm>
-            <a:off x="7680960" y="2926080"/>
-            <a:ext cx="1828800" cy="914400"/>
+            <a:off x="731520" y="5806440"/>
+            <a:ext cx="10698480" cy="685800"/>
           </a:xfrm>
           <a:prstGeom prst="rect">
             <a:avLst/>
           </a:prstGeom>
           <a:solidFill>
-            <a:srgbClr val="3A508F"/>
+            <a:srgbClr val="1A1A1A"/>
           </a:solidFill>
           <a:ln>
             <a:noFill/>
@@ -4306,36 +5303,23 @@
           </a:fontRef>
         </p:style>
         <p:txBody>
-          <a:bodyPr rtlCol="0" anchor="ctr" wrap="square"/>
-          <a:lstStyle/>
-          <a:p>
-            <a:pPr algn="ctr">
-              <a:spcBef>
-                <a:spcPts val="1400"/>
-              </a:spcBef>
-              <a:defRPr sz="1600" b="1">
-                <a:solidFill>
-                  <a:srgbClr val="FFFFFF"/>
-                </a:solidFill>
-                <a:latin typeface="Calibri"/>
-              </a:defRPr>
-            </a:pPr>
-            <a:r>
-              <a:t>Preference Reranking</a:t>
-            </a:r>
-          </a:p>
-        </p:txBody>
-      </p:sp>
-      <p:sp>
-        <p:nvSpPr>
-          <p:cNvPr id="11" name="TextBox 10"/>
+          <a:bodyPr rtlCol="0" anchor="ctr"/>
+          <a:lstStyle/>
+          <a:p>
+            <a:pPr algn="ctr"/>
+          </a:p>
+        </p:txBody>
+      </p:sp>
+      <p:sp>
+        <p:nvSpPr>
+          <p:cNvPr id="13" name="TextBox 12"/>
           <p:cNvSpPr txBox="1"/>
           <p:nvPr/>
         </p:nvSpPr>
         <p:spPr>
           <a:xfrm>
-            <a:off x="9555480" y="3108960"/>
-            <a:ext cx="365760" cy="548640"/>
+            <a:off x="1005840" y="5879592"/>
+            <a:ext cx="10149840" cy="548640"/>
           </a:xfrm>
           <a:prstGeom prst="rect">
             <a:avLst/>
@@ -4349,251 +5333,15 @@
           <a:lstStyle/>
           <a:p>
             <a:pPr algn="ctr">
-              <a:defRPr sz="2800" b="0">
-                <a:solidFill>
-                  <a:srgbClr val="7C6BE6"/>
-                </a:solidFill>
-                <a:latin typeface="Calibri"/>
-              </a:defRPr>
-            </a:pPr>
-            <a:r>
-              <a:t>→</a:t>
-            </a:r>
-          </a:p>
-        </p:txBody>
-      </p:sp>
-      <p:sp>
-        <p:nvSpPr>
-          <p:cNvPr id="12" name="Rectangle 11"/>
-          <p:cNvSpPr/>
-          <p:nvPr/>
-        </p:nvSpPr>
-        <p:spPr>
-          <a:xfrm>
-            <a:off x="9966960" y="2926080"/>
-            <a:ext cx="1828800" cy="914400"/>
-          </a:xfrm>
-          <a:prstGeom prst="rect">
-            <a:avLst/>
-          </a:prstGeom>
-          <a:solidFill>
-            <a:srgbClr val="4EC9B0"/>
-          </a:solidFill>
-          <a:ln>
-            <a:noFill/>
-          </a:ln>
-        </p:spPr>
-        <p:style>
-          <a:lnRef idx="1">
-            <a:schemeClr val="accent1"/>
-          </a:lnRef>
-          <a:fillRef idx="3">
-            <a:schemeClr val="accent1"/>
-          </a:fillRef>
-          <a:effectRef idx="2">
-            <a:schemeClr val="accent1"/>
-          </a:effectRef>
-          <a:fontRef idx="minor">
-            <a:schemeClr val="lt1"/>
-          </a:fontRef>
-        </p:style>
-        <p:txBody>
-          <a:bodyPr rtlCol="0" anchor="ctr" wrap="square"/>
-          <a:lstStyle/>
-          <a:p>
-            <a:pPr algn="ctr">
-              <a:spcBef>
-                <a:spcPts val="1400"/>
-              </a:spcBef>
-              <a:defRPr sz="1600" b="1">
-                <a:solidFill>
-                  <a:srgbClr val="FFFFFF"/>
-                </a:solidFill>
-                <a:latin typeface="Calibri"/>
-              </a:defRPr>
-            </a:pPr>
-            <a:r>
-              <a:t>Results Display</a:t>
-            </a:r>
-          </a:p>
-        </p:txBody>
-      </p:sp>
-      <p:sp>
-        <p:nvSpPr>
-          <p:cNvPr id="13" name="TextBox 12"/>
-          <p:cNvSpPr txBox="1"/>
-          <p:nvPr/>
-        </p:nvSpPr>
-        <p:spPr>
-          <a:xfrm>
-            <a:off x="822960" y="4023360"/>
-            <a:ext cx="1828800" cy="457200"/>
-          </a:xfrm>
-          <a:prstGeom prst="rect">
-            <a:avLst/>
-          </a:prstGeom>
-          <a:noFill/>
-        </p:spPr>
-        <p:txBody>
-          <a:bodyPr wrap="square">
-            <a:spAutoFit/>
-          </a:bodyPr>
-          <a:lstStyle/>
-          <a:p>
-            <a:pPr algn="ctr">
-              <a:defRPr sz="1300" b="0">
-                <a:solidFill>
-                  <a:srgbClr val="BBBBCC"/>
-                </a:solidFill>
-                <a:latin typeface="Calibri"/>
-              </a:defRPr>
-            </a:pPr>
-            <a:r>
-              <a:t>Streamlit UI</a:t>
-            </a:r>
-          </a:p>
-        </p:txBody>
-      </p:sp>
-      <p:sp>
-        <p:nvSpPr>
-          <p:cNvPr id="14" name="TextBox 13"/>
-          <p:cNvSpPr txBox="1"/>
-          <p:nvPr/>
-        </p:nvSpPr>
-        <p:spPr>
-          <a:xfrm>
-            <a:off x="3108960" y="4023360"/>
-            <a:ext cx="1828800" cy="457200"/>
-          </a:xfrm>
-          <a:prstGeom prst="rect">
-            <a:avLst/>
-          </a:prstGeom>
-          <a:noFill/>
-        </p:spPr>
-        <p:txBody>
-          <a:bodyPr wrap="square">
-            <a:spAutoFit/>
-          </a:bodyPr>
-          <a:lstStyle/>
-          <a:p>
-            <a:pPr algn="ctr">
-              <a:defRPr sz="1300" b="0">
-                <a:solidFill>
-                  <a:srgbClr val="BBBBCC"/>
-                </a:solidFill>
-                <a:latin typeface="Calibri"/>
-              </a:defRPr>
-            </a:pPr>
-            <a:r>
-              <a:t>512-dim embedding</a:t>
-            </a:r>
-          </a:p>
-        </p:txBody>
-      </p:sp>
-      <p:sp>
-        <p:nvSpPr>
-          <p:cNvPr id="15" name="TextBox 14"/>
-          <p:cNvSpPr txBox="1"/>
-          <p:nvPr/>
-        </p:nvSpPr>
-        <p:spPr>
-          <a:xfrm>
-            <a:off x="5394960" y="4023360"/>
-            <a:ext cx="1828800" cy="457200"/>
-          </a:xfrm>
-          <a:prstGeom prst="rect">
-            <a:avLst/>
-          </a:prstGeom>
-          <a:noFill/>
-        </p:spPr>
-        <p:txBody>
-          <a:bodyPr wrap="square">
-            <a:spAutoFit/>
-          </a:bodyPr>
-          <a:lstStyle/>
-          <a:p>
-            <a:pPr algn="ctr">
-              <a:defRPr sz="1300" b="0">
-                <a:solidFill>
-                  <a:srgbClr val="BBBBCC"/>
-                </a:solidFill>
-                <a:latin typeface="Calibri"/>
-              </a:defRPr>
-            </a:pPr>
-            <a:r>
-              <a:t>Top-5 neighbors</a:t>
-            </a:r>
-          </a:p>
-        </p:txBody>
-      </p:sp>
-      <p:sp>
-        <p:nvSpPr>
-          <p:cNvPr id="16" name="TextBox 15"/>
-          <p:cNvSpPr txBox="1"/>
-          <p:nvPr/>
-        </p:nvSpPr>
-        <p:spPr>
-          <a:xfrm>
-            <a:off x="7680960" y="4023360"/>
-            <a:ext cx="1828800" cy="457200"/>
-          </a:xfrm>
-          <a:prstGeom prst="rect">
-            <a:avLst/>
-          </a:prstGeom>
-          <a:noFill/>
-        </p:spPr>
-        <p:txBody>
-          <a:bodyPr wrap="square">
-            <a:spAutoFit/>
-          </a:bodyPr>
-          <a:lstStyle/>
-          <a:p>
-            <a:pPr algn="ctr">
-              <a:defRPr sz="1300" b="0">
-                <a:solidFill>
-                  <a:srgbClr val="BBBBCC"/>
-                </a:solidFill>
-                <a:latin typeface="Calibri"/>
-              </a:defRPr>
-            </a:pPr>
-            <a:r>
-              <a:t>Goal/Avoid scoring</a:t>
-            </a:r>
-          </a:p>
-        </p:txBody>
-      </p:sp>
-      <p:sp>
-        <p:nvSpPr>
-          <p:cNvPr id="17" name="TextBox 16"/>
-          <p:cNvSpPr txBox="1"/>
-          <p:nvPr/>
-        </p:nvSpPr>
-        <p:spPr>
-          <a:xfrm>
-            <a:off x="9966960" y="4023360"/>
-            <a:ext cx="1828800" cy="457200"/>
-          </a:xfrm>
-          <a:prstGeom prst="rect">
-            <a:avLst/>
-          </a:prstGeom>
-          <a:noFill/>
-        </p:spPr>
-        <p:txBody>
-          <a:bodyPr wrap="square">
-            <a:spAutoFit/>
-          </a:bodyPr>
-          <a:lstStyle/>
-          <a:p>
-            <a:pPr algn="ctr">
-              <a:defRPr sz="1300" b="0">
-                <a:solidFill>
-                  <a:srgbClr val="BBBBCC"/>
-                </a:solidFill>
-                <a:latin typeface="Calibri"/>
-              </a:defRPr>
-            </a:pPr>
-            <a:r>
-              <a:t>Baseline + Reranked</a:t>
+              <a:defRPr sz="2200" b="1" i="0">
+                <a:solidFill>
+                  <a:srgbClr val="00C9A7"/>
+                </a:solidFill>
+                <a:latin typeface="Calibri"/>
+              </a:defRPr>
+            </a:pPr>
+            <a:r>
+              <a:t>"Users can now steer results — instead of just accepting them."</a:t>
             </a:r>
           </a:p>
         </p:txBody>
@@ -4612,7 +5360,7 @@
     <p:bg>
       <p:bgPr>
         <a:solidFill>
-          <a:srgbClr val="1A1A2E"/>
+          <a:srgbClr val="0F0F0F"/>
         </a:solidFill>
         <a:effectLst/>
       </p:bgPr>
@@ -4632,14 +5380,14 @@
         </p:nvSpPr>
         <p:spPr>
           <a:xfrm>
-            <a:off x="731520" y="731520"/>
-            <a:ext cx="73152" cy="548640"/>
+            <a:off x="0" y="0"/>
+            <a:ext cx="54864" cy="6858000"/>
           </a:xfrm>
           <a:prstGeom prst="rect">
             <a:avLst/>
           </a:prstGeom>
           <a:solidFill>
-            <a:srgbClr val="533CD0"/>
+            <a:srgbClr val="00C9A7"/>
           </a:solidFill>
           <a:ln>
             <a:noFill/>
@@ -4669,14 +5417,57 @@
       </p:sp>
       <p:sp>
         <p:nvSpPr>
-          <p:cNvPr id="3" name="TextBox 2"/>
+          <p:cNvPr id="3" name="Rectangle 2"/>
+          <p:cNvSpPr/>
+          <p:nvPr/>
+        </p:nvSpPr>
+        <p:spPr>
+          <a:xfrm>
+            <a:off x="731520" y="658368"/>
+            <a:ext cx="1463040" cy="329184"/>
+          </a:xfrm>
+          <a:prstGeom prst="rect">
+            <a:avLst/>
+          </a:prstGeom>
+          <a:solidFill>
+            <a:srgbClr val="00C9A7"/>
+          </a:solidFill>
+          <a:ln>
+            <a:noFill/>
+          </a:ln>
+        </p:spPr>
+        <p:style>
+          <a:lnRef idx="1">
+            <a:schemeClr val="accent1"/>
+          </a:lnRef>
+          <a:fillRef idx="3">
+            <a:schemeClr val="accent1"/>
+          </a:fillRef>
+          <a:effectRef idx="2">
+            <a:schemeClr val="accent1"/>
+          </a:effectRef>
+          <a:fontRef idx="minor">
+            <a:schemeClr val="lt1"/>
+          </a:fontRef>
+        </p:style>
+        <p:txBody>
+          <a:bodyPr rtlCol="0" anchor="ctr"/>
+          <a:lstStyle/>
+          <a:p>
+            <a:pPr algn="ctr"/>
+          </a:p>
+        </p:txBody>
+      </p:sp>
+      <p:sp>
+        <p:nvSpPr>
+          <p:cNvPr id="4" name="TextBox 3"/>
           <p:cNvSpPr txBox="1"/>
           <p:nvPr/>
         </p:nvSpPr>
         <p:spPr>
           <a:xfrm>
-            <a:off x="1005840" y="640080"/>
-            <a:ext cx="9144000" cy="731520"/>
+            <a:off x="749808" y="676656"/>
+            <a:ext cx="1426464" cy="292608"/>
           </a:xfrm>
           <a:prstGeom prst="rect">
             <a:avLst/>
@@ -4689,8 +5480,8 @@
           </a:bodyPr>
           <a:lstStyle/>
           <a:p>
-            <a:pPr algn="l">
-              <a:defRPr sz="3600" b="1">
+            <a:pPr algn="ctr">
+              <a:defRPr sz="1300" b="1" i="0">
                 <a:solidFill>
                   <a:srgbClr val="FFFFFF"/>
                 </a:solidFill>
@@ -4698,21 +5489,21 @@
               </a:defRPr>
             </a:pPr>
             <a:r>
-              <a:t>Tech Stack</a:t>
-            </a:r>
-          </a:p>
-        </p:txBody>
-      </p:sp>
-      <p:sp>
-        <p:nvSpPr>
-          <p:cNvPr id="4" name="TextBox 3"/>
+              <a:t>STAGE 3</a:t>
+            </a:r>
+          </a:p>
+        </p:txBody>
+      </p:sp>
+      <p:sp>
+        <p:nvSpPr>
+          <p:cNvPr id="5" name="TextBox 4"/>
           <p:cNvSpPr txBox="1"/>
           <p:nvPr/>
         </p:nvSpPr>
         <p:spPr>
           <a:xfrm>
-            <a:off x="1371600" y="1828800"/>
-            <a:ext cx="3200400" cy="457200"/>
+            <a:off x="822960" y="502920"/>
+            <a:ext cx="9144000" cy="640080"/>
           </a:xfrm>
           <a:prstGeom prst="rect">
             <a:avLst/>
@@ -4726,29 +5517,72 @@
           <a:lstStyle/>
           <a:p>
             <a:pPr algn="l">
-              <a:defRPr sz="1800" b="1">
-                <a:solidFill>
-                  <a:srgbClr val="7C6BE6"/>
-                </a:solidFill>
-                <a:latin typeface="Calibri"/>
-              </a:defRPr>
-            </a:pPr>
-            <a:r>
-              <a:t>Web Application</a:t>
-            </a:r>
-          </a:p>
-        </p:txBody>
-      </p:sp>
-      <p:sp>
-        <p:nvSpPr>
-          <p:cNvPr id="5" name="TextBox 4"/>
+              <a:defRPr sz="3600" b="1" i="0">
+                <a:solidFill>
+                  <a:srgbClr val="FFFFFF"/>
+                </a:solidFill>
+                <a:latin typeface="Calibri"/>
+              </a:defRPr>
+            </a:pPr>
+            <a:r>
+              <a:t>Major Upgrade: FashionCLIP + FAISS</a:t>
+            </a:r>
+          </a:p>
+        </p:txBody>
+      </p:sp>
+      <p:sp>
+        <p:nvSpPr>
+          <p:cNvPr id="6" name="Rectangle 5"/>
+          <p:cNvSpPr/>
+          <p:nvPr/>
+        </p:nvSpPr>
+        <p:spPr>
+          <a:xfrm>
+            <a:off x="731520" y="1234440"/>
+            <a:ext cx="10698480" cy="36576"/>
+          </a:xfrm>
+          <a:prstGeom prst="rect">
+            <a:avLst/>
+          </a:prstGeom>
+          <a:solidFill>
+            <a:srgbClr val="00C9A7"/>
+          </a:solidFill>
+          <a:ln>
+            <a:noFill/>
+          </a:ln>
+        </p:spPr>
+        <p:style>
+          <a:lnRef idx="1">
+            <a:schemeClr val="accent1"/>
+          </a:lnRef>
+          <a:fillRef idx="3">
+            <a:schemeClr val="accent1"/>
+          </a:fillRef>
+          <a:effectRef idx="2">
+            <a:schemeClr val="accent1"/>
+          </a:effectRef>
+          <a:fontRef idx="minor">
+            <a:schemeClr val="lt1"/>
+          </a:fontRef>
+        </p:style>
+        <p:txBody>
+          <a:bodyPr rtlCol="0" anchor="ctr"/>
+          <a:lstStyle/>
+          <a:p>
+            <a:pPr algn="ctr"/>
+          </a:p>
+        </p:txBody>
+      </p:sp>
+      <p:sp>
+        <p:nvSpPr>
+          <p:cNvPr id="7" name="TextBox 6"/>
           <p:cNvSpPr txBox="1"/>
           <p:nvPr/>
         </p:nvSpPr>
         <p:spPr>
           <a:xfrm>
-            <a:off x="4572000" y="1828800"/>
-            <a:ext cx="6400800" cy="457200"/>
+            <a:off x="822960" y="1463040"/>
+            <a:ext cx="10058400" cy="502920"/>
           </a:xfrm>
           <a:prstGeom prst="rect">
             <a:avLst/>
@@ -4762,29 +5596,115 @@
           <a:lstStyle/>
           <a:p>
             <a:pPr algn="l">
-              <a:defRPr sz="1800" b="0">
-                <a:solidFill>
-                  <a:srgbClr val="FFFFFF"/>
-                </a:solidFill>
-                <a:latin typeface="Calibri"/>
-              </a:defRPr>
-            </a:pPr>
-            <a:r>
-              <a:t>Streamlit</a:t>
-            </a:r>
-          </a:p>
-        </p:txBody>
-      </p:sp>
-      <p:sp>
-        <p:nvSpPr>
-          <p:cNvPr id="6" name="TextBox 5"/>
+              <a:defRPr sz="2000" b="0" i="1">
+                <a:solidFill>
+                  <a:srgbClr val="888899"/>
+                </a:solidFill>
+                <a:latin typeface="Calibri"/>
+              </a:defRPr>
+            </a:pPr>
+            <a:r>
+              <a:t>"I upgraded both the model and the search system."</a:t>
+            </a:r>
+          </a:p>
+        </p:txBody>
+      </p:sp>
+      <p:sp>
+        <p:nvSpPr>
+          <p:cNvPr id="8" name="Rectangle 7"/>
+          <p:cNvSpPr/>
+          <p:nvPr/>
+        </p:nvSpPr>
+        <p:spPr>
+          <a:xfrm>
+            <a:off x="822960" y="2194560"/>
+            <a:ext cx="4937760" cy="3108960"/>
+          </a:xfrm>
+          <a:prstGeom prst="rect">
+            <a:avLst/>
+          </a:prstGeom>
+          <a:solidFill>
+            <a:srgbClr val="1A1A1A"/>
+          </a:solidFill>
+          <a:ln>
+            <a:noFill/>
+          </a:ln>
+        </p:spPr>
+        <p:style>
+          <a:lnRef idx="1">
+            <a:schemeClr val="accent1"/>
+          </a:lnRef>
+          <a:fillRef idx="3">
+            <a:schemeClr val="accent1"/>
+          </a:fillRef>
+          <a:effectRef idx="2">
+            <a:schemeClr val="accent1"/>
+          </a:effectRef>
+          <a:fontRef idx="minor">
+            <a:schemeClr val="lt1"/>
+          </a:fontRef>
+        </p:style>
+        <p:txBody>
+          <a:bodyPr rtlCol="0" anchor="ctr"/>
+          <a:lstStyle/>
+          <a:p>
+            <a:pPr algn="ctr"/>
+          </a:p>
+        </p:txBody>
+      </p:sp>
+      <p:sp>
+        <p:nvSpPr>
+          <p:cNvPr id="9" name="Rectangle 8"/>
+          <p:cNvSpPr/>
+          <p:nvPr/>
+        </p:nvSpPr>
+        <p:spPr>
+          <a:xfrm>
+            <a:off x="822960" y="2194560"/>
+            <a:ext cx="4937760" cy="347472"/>
+          </a:xfrm>
+          <a:prstGeom prst="rect">
+            <a:avLst/>
+          </a:prstGeom>
+          <a:solidFill>
+            <a:srgbClr val="6C63FF"/>
+          </a:solidFill>
+          <a:ln>
+            <a:noFill/>
+          </a:ln>
+        </p:spPr>
+        <p:style>
+          <a:lnRef idx="1">
+            <a:schemeClr val="accent1"/>
+          </a:lnRef>
+          <a:fillRef idx="3">
+            <a:schemeClr val="accent1"/>
+          </a:fillRef>
+          <a:effectRef idx="2">
+            <a:schemeClr val="accent1"/>
+          </a:effectRef>
+          <a:fontRef idx="minor">
+            <a:schemeClr val="lt1"/>
+          </a:fontRef>
+        </p:style>
+        <p:txBody>
+          <a:bodyPr rtlCol="0" anchor="ctr"/>
+          <a:lstStyle/>
+          <a:p>
+            <a:pPr algn="ctr"/>
+          </a:p>
+        </p:txBody>
+      </p:sp>
+      <p:sp>
+        <p:nvSpPr>
+          <p:cNvPr id="10" name="TextBox 9"/>
           <p:cNvSpPr txBox="1"/>
           <p:nvPr/>
         </p:nvSpPr>
         <p:spPr>
           <a:xfrm>
-            <a:off x="1371600" y="2423160"/>
-            <a:ext cx="3200400" cy="457200"/>
+            <a:off x="914400" y="2231136"/>
+            <a:ext cx="4754880" cy="320040"/>
           </a:xfrm>
           <a:prstGeom prst="rect">
             <a:avLst/>
@@ -4797,30 +5717,30 @@
           </a:bodyPr>
           <a:lstStyle/>
           <a:p>
-            <a:pPr algn="l">
-              <a:defRPr sz="1800" b="1">
-                <a:solidFill>
-                  <a:srgbClr val="7C6BE6"/>
-                </a:solidFill>
-                <a:latin typeface="Calibri"/>
-              </a:defRPr>
-            </a:pPr>
-            <a:r>
-              <a:t>Embedding Model</a:t>
-            </a:r>
-          </a:p>
-        </p:txBody>
-      </p:sp>
-      <p:sp>
-        <p:nvSpPr>
-          <p:cNvPr id="7" name="TextBox 6"/>
+            <a:pPr algn="ctr">
+              <a:defRPr sz="1400" b="1" i="0">
+                <a:solidFill>
+                  <a:srgbClr val="FFFFFF"/>
+                </a:solidFill>
+                <a:latin typeface="Calibri"/>
+              </a:defRPr>
+            </a:pPr>
+            <a:r>
+              <a:t>MODEL</a:t>
+            </a:r>
+          </a:p>
+        </p:txBody>
+      </p:sp>
+      <p:sp>
+        <p:nvSpPr>
+          <p:cNvPr id="11" name="TextBox 10"/>
           <p:cNvSpPr txBox="1"/>
           <p:nvPr/>
         </p:nvSpPr>
         <p:spPr>
           <a:xfrm>
-            <a:off x="4572000" y="2423160"/>
-            <a:ext cx="6400800" cy="457200"/>
+            <a:off x="914400" y="2697480"/>
+            <a:ext cx="2011680" cy="365760"/>
           </a:xfrm>
           <a:prstGeom prst="rect">
             <a:avLst/>
@@ -4834,29 +5754,29 @@
           <a:lstStyle/>
           <a:p>
             <a:pPr algn="l">
-              <a:defRPr sz="1800" b="0">
-                <a:solidFill>
-                  <a:srgbClr val="FFFFFF"/>
-                </a:solidFill>
-                <a:latin typeface="Calibri"/>
-              </a:defRPr>
-            </a:pPr>
-            <a:r>
-              <a:t>FashionCLIP (ViT-B/32 fine-tuned on fashion data)</a:t>
-            </a:r>
-          </a:p>
-        </p:txBody>
-      </p:sp>
-      <p:sp>
-        <p:nvSpPr>
-          <p:cNvPr id="8" name="TextBox 7"/>
+              <a:defRPr sz="1400" b="1" i="0">
+                <a:solidFill>
+                  <a:srgbClr val="888899"/>
+                </a:solidFill>
+                <a:latin typeface="Calibri"/>
+              </a:defRPr>
+            </a:pPr>
+            <a:r>
+              <a:t>Before</a:t>
+            </a:r>
+          </a:p>
+        </p:txBody>
+      </p:sp>
+      <p:sp>
+        <p:nvSpPr>
+          <p:cNvPr id="12" name="TextBox 11"/>
           <p:cNvSpPr txBox="1"/>
           <p:nvPr/>
         </p:nvSpPr>
         <p:spPr>
           <a:xfrm>
-            <a:off x="1371600" y="3017520"/>
-            <a:ext cx="3200400" cy="457200"/>
+            <a:off x="3108960" y="2697480"/>
+            <a:ext cx="2377440" cy="365760"/>
           </a:xfrm>
           <a:prstGeom prst="rect">
             <a:avLst/>
@@ -4870,29 +5790,29 @@
           <a:lstStyle/>
           <a:p>
             <a:pPr algn="l">
-              <a:defRPr sz="1800" b="1">
-                <a:solidFill>
-                  <a:srgbClr val="7C6BE6"/>
-                </a:solidFill>
-                <a:latin typeface="Calibri"/>
-              </a:defRPr>
-            </a:pPr>
-            <a:r>
-              <a:t>Vector Search</a:t>
-            </a:r>
-          </a:p>
-        </p:txBody>
-      </p:sp>
-      <p:sp>
-        <p:nvSpPr>
-          <p:cNvPr id="9" name="TextBox 8"/>
+              <a:defRPr sz="1400" b="1" i="0">
+                <a:solidFill>
+                  <a:srgbClr val="00C9A7"/>
+                </a:solidFill>
+                <a:latin typeface="Calibri"/>
+              </a:defRPr>
+            </a:pPr>
+            <a:r>
+              <a:t>After</a:t>
+            </a:r>
+          </a:p>
+        </p:txBody>
+      </p:sp>
+      <p:sp>
+        <p:nvSpPr>
+          <p:cNvPr id="13" name="TextBox 12"/>
           <p:cNvSpPr txBox="1"/>
           <p:nvPr/>
         </p:nvSpPr>
         <p:spPr>
           <a:xfrm>
-            <a:off x="4572000" y="3017520"/>
-            <a:ext cx="6400800" cy="457200"/>
+            <a:off x="914400" y="3108960"/>
+            <a:ext cx="1828800" cy="548640"/>
           </a:xfrm>
           <a:prstGeom prst="rect">
             <a:avLst/>
@@ -4906,29 +5826,29 @@
           <a:lstStyle/>
           <a:p>
             <a:pPr algn="l">
-              <a:defRPr sz="1800" b="0">
-                <a:solidFill>
-                  <a:srgbClr val="FFFFFF"/>
-                </a:solidFill>
-                <a:latin typeface="Calibri"/>
-              </a:defRPr>
-            </a:pPr>
-            <a:r>
-              <a:t>FAISS (IndexFlatIP — exact inner-product search)</a:t>
-            </a:r>
-          </a:p>
-        </p:txBody>
-      </p:sp>
-      <p:sp>
-        <p:nvSpPr>
-          <p:cNvPr id="10" name="TextBox 9"/>
+              <a:defRPr sz="1600" b="0" i="0">
+                <a:solidFill>
+                  <a:srgbClr val="888899"/>
+                </a:solidFill>
+                <a:latin typeface="Calibri"/>
+              </a:defRPr>
+            </a:pPr>
+            <a:r>
+              <a:t>OpenAI CLIP</a:t>
+            </a:r>
+          </a:p>
+        </p:txBody>
+      </p:sp>
+      <p:sp>
+        <p:nvSpPr>
+          <p:cNvPr id="14" name="TextBox 13"/>
           <p:cNvSpPr txBox="1"/>
           <p:nvPr/>
         </p:nvSpPr>
         <p:spPr>
           <a:xfrm>
-            <a:off x="1371600" y="3611880"/>
-            <a:ext cx="3200400" cy="457200"/>
+            <a:off x="2743200" y="3108960"/>
+            <a:ext cx="457200" cy="548640"/>
           </a:xfrm>
           <a:prstGeom prst="rect">
             <a:avLst/>
@@ -4941,30 +5861,30 @@
           </a:bodyPr>
           <a:lstStyle/>
           <a:p>
-            <a:pPr algn="l">
-              <a:defRPr sz="1800" b="1">
-                <a:solidFill>
-                  <a:srgbClr val="7C6BE6"/>
-                </a:solidFill>
-                <a:latin typeface="Calibri"/>
-              </a:defRPr>
-            </a:pPr>
-            <a:r>
-              <a:t>Preference Reranking</a:t>
-            </a:r>
-          </a:p>
-        </p:txBody>
-      </p:sp>
-      <p:sp>
-        <p:nvSpPr>
-          <p:cNvPr id="11" name="TextBox 10"/>
+            <a:pPr algn="ctr">
+              <a:defRPr sz="2000" b="0" i="0">
+                <a:solidFill>
+                  <a:srgbClr val="888899"/>
+                </a:solidFill>
+                <a:latin typeface="Calibri"/>
+              </a:defRPr>
+            </a:pPr>
+            <a:r>
+              <a:t>→</a:t>
+            </a:r>
+          </a:p>
+        </p:txBody>
+      </p:sp>
+      <p:sp>
+        <p:nvSpPr>
+          <p:cNvPr id="15" name="TextBox 14"/>
           <p:cNvSpPr txBox="1"/>
           <p:nvPr/>
         </p:nvSpPr>
         <p:spPr>
           <a:xfrm>
-            <a:off x="4572000" y="3611880"/>
-            <a:ext cx="6400800" cy="457200"/>
+            <a:off x="3200400" y="3108960"/>
+            <a:ext cx="2286000" cy="548640"/>
           </a:xfrm>
           <a:prstGeom prst="rect">
             <a:avLst/>
@@ -4978,29 +5898,29 @@
           <a:lstStyle/>
           <a:p>
             <a:pPr algn="l">
-              <a:defRPr sz="1800" b="0">
-                <a:solidFill>
-                  <a:srgbClr val="FFFFFF"/>
-                </a:solidFill>
-                <a:latin typeface="Calibri"/>
-              </a:defRPr>
-            </a:pPr>
-            <a:r>
-              <a:t>FashionCLIP text embeddings + weighted scoring</a:t>
-            </a:r>
-          </a:p>
-        </p:txBody>
-      </p:sp>
-      <p:sp>
-        <p:nvSpPr>
-          <p:cNvPr id="12" name="TextBox 11"/>
+              <a:defRPr sz="1600" b="1" i="0">
+                <a:solidFill>
+                  <a:srgbClr val="00C9A7"/>
+                </a:solidFill>
+                <a:latin typeface="Calibri"/>
+              </a:defRPr>
+            </a:pPr>
+            <a:r>
+              <a:t>FashionCLIP</a:t>
+            </a:r>
+          </a:p>
+        </p:txBody>
+      </p:sp>
+      <p:sp>
+        <p:nvSpPr>
+          <p:cNvPr id="16" name="TextBox 15"/>
           <p:cNvSpPr txBox="1"/>
           <p:nvPr/>
         </p:nvSpPr>
         <p:spPr>
           <a:xfrm>
-            <a:off x="1371600" y="4206240"/>
-            <a:ext cx="3200400" cy="457200"/>
+            <a:off x="914400" y="3749039"/>
+            <a:ext cx="4572000" cy="1371600"/>
           </a:xfrm>
           <a:prstGeom prst="rect">
             <a:avLst/>
@@ -5013,30 +5933,151 @@
           </a:bodyPr>
           <a:lstStyle/>
           <a:p>
-            <a:pPr algn="l">
-              <a:defRPr sz="1800" b="1">
-                <a:solidFill>
-                  <a:srgbClr val="7C6BE6"/>
-                </a:solidFill>
-                <a:latin typeface="Calibri"/>
-              </a:defRPr>
-            </a:pPr>
-            <a:r>
-              <a:t>Image Processing</a:t>
-            </a:r>
-          </a:p>
-        </p:txBody>
-      </p:sp>
-      <p:sp>
-        <p:nvSpPr>
-          <p:cNvPr id="13" name="TextBox 12"/>
+            <a:pPr>
+              <a:spcAft>
+                <a:spcPts val="800"/>
+              </a:spcAft>
+              <a:defRPr sz="1500">
+                <a:solidFill>
+                  <a:srgbClr val="E8E8E8"/>
+                </a:solidFill>
+                <a:latin typeface="Calibri"/>
+              </a:defRPr>
+            </a:pPr>
+            <a:r>
+              <a:t>  General-purpose → fashion-specific</a:t>
+            </a:r>
+          </a:p>
+          <a:p>
+            <a:pPr>
+              <a:spcAft>
+                <a:spcPts val="800"/>
+              </a:spcAft>
+              <a:defRPr sz="1500">
+                <a:solidFill>
+                  <a:srgbClr val="E8E8E8"/>
+                </a:solidFill>
+                <a:latin typeface="Calibri"/>
+              </a:defRPr>
+            </a:pPr>
+            <a:r>
+              <a:t>  Trained on 800K fashion image-text pairs</a:t>
+            </a:r>
+          </a:p>
+          <a:p>
+            <a:pPr>
+              <a:spcAft>
+                <a:spcPts val="800"/>
+              </a:spcAft>
+              <a:defRPr sz="1500">
+                <a:solidFill>
+                  <a:srgbClr val="E8E8E8"/>
+                </a:solidFill>
+                <a:latin typeface="Calibri"/>
+              </a:defRPr>
+            </a:pPr>
+            <a:r>
+              <a:t>  Better at garment types, styles, fabrics</a:t>
+            </a:r>
+          </a:p>
+        </p:txBody>
+      </p:sp>
+      <p:sp>
+        <p:nvSpPr>
+          <p:cNvPr id="17" name="Rectangle 16"/>
+          <p:cNvSpPr/>
+          <p:nvPr/>
+        </p:nvSpPr>
+        <p:spPr>
+          <a:xfrm>
+            <a:off x="6400800" y="2194560"/>
+            <a:ext cx="4937760" cy="3108960"/>
+          </a:xfrm>
+          <a:prstGeom prst="rect">
+            <a:avLst/>
+          </a:prstGeom>
+          <a:solidFill>
+            <a:srgbClr val="1A1A1A"/>
+          </a:solidFill>
+          <a:ln>
+            <a:noFill/>
+          </a:ln>
+        </p:spPr>
+        <p:style>
+          <a:lnRef idx="1">
+            <a:schemeClr val="accent1"/>
+          </a:lnRef>
+          <a:fillRef idx="3">
+            <a:schemeClr val="accent1"/>
+          </a:fillRef>
+          <a:effectRef idx="2">
+            <a:schemeClr val="accent1"/>
+          </a:effectRef>
+          <a:fontRef idx="minor">
+            <a:schemeClr val="lt1"/>
+          </a:fontRef>
+        </p:style>
+        <p:txBody>
+          <a:bodyPr rtlCol="0" anchor="ctr"/>
+          <a:lstStyle/>
+          <a:p>
+            <a:pPr algn="ctr"/>
+          </a:p>
+        </p:txBody>
+      </p:sp>
+      <p:sp>
+        <p:nvSpPr>
+          <p:cNvPr id="18" name="Rectangle 17"/>
+          <p:cNvSpPr/>
+          <p:nvPr/>
+        </p:nvSpPr>
+        <p:spPr>
+          <a:xfrm>
+            <a:off x="6400800" y="2194560"/>
+            <a:ext cx="4937760" cy="347472"/>
+          </a:xfrm>
+          <a:prstGeom prst="rect">
+            <a:avLst/>
+          </a:prstGeom>
+          <a:solidFill>
+            <a:srgbClr val="6C63FF"/>
+          </a:solidFill>
+          <a:ln>
+            <a:noFill/>
+          </a:ln>
+        </p:spPr>
+        <p:style>
+          <a:lnRef idx="1">
+            <a:schemeClr val="accent1"/>
+          </a:lnRef>
+          <a:fillRef idx="3">
+            <a:schemeClr val="accent1"/>
+          </a:fillRef>
+          <a:effectRef idx="2">
+            <a:schemeClr val="accent1"/>
+          </a:effectRef>
+          <a:fontRef idx="minor">
+            <a:schemeClr val="lt1"/>
+          </a:fontRef>
+        </p:style>
+        <p:txBody>
+          <a:bodyPr rtlCol="0" anchor="ctr"/>
+          <a:lstStyle/>
+          <a:p>
+            <a:pPr algn="ctr"/>
+          </a:p>
+        </p:txBody>
+      </p:sp>
+      <p:sp>
+        <p:nvSpPr>
+          <p:cNvPr id="19" name="TextBox 18"/>
           <p:cNvSpPr txBox="1"/>
           <p:nvPr/>
         </p:nvSpPr>
         <p:spPr>
           <a:xfrm>
-            <a:off x="4572000" y="4206240"/>
-            <a:ext cx="6400800" cy="457200"/>
+            <a:off x="6492240" y="2231136"/>
+            <a:ext cx="4754880" cy="320040"/>
           </a:xfrm>
           <a:prstGeom prst="rect">
             <a:avLst/>
@@ -5049,8 +6090,8 @@
           </a:bodyPr>
           <a:lstStyle/>
           <a:p>
-            <a:pPr algn="l">
-              <a:defRPr sz="1800" b="0">
+            <a:pPr algn="ctr">
+              <a:defRPr sz="1400" b="1" i="0">
                 <a:solidFill>
                   <a:srgbClr val="FFFFFF"/>
                 </a:solidFill>
@@ -5058,21 +6099,21 @@
               </a:defRPr>
             </a:pPr>
             <a:r>
-              <a:t>Pillow, PyTorch, torchvision</a:t>
-            </a:r>
-          </a:p>
-        </p:txBody>
-      </p:sp>
-      <p:sp>
-        <p:nvSpPr>
-          <p:cNvPr id="14" name="TextBox 13"/>
+              <a:t>SEARCH</a:t>
+            </a:r>
+          </a:p>
+        </p:txBody>
+      </p:sp>
+      <p:sp>
+        <p:nvSpPr>
+          <p:cNvPr id="20" name="TextBox 19"/>
           <p:cNvSpPr txBox="1"/>
           <p:nvPr/>
         </p:nvSpPr>
         <p:spPr>
           <a:xfrm>
-            <a:off x="1371600" y="4800600"/>
-            <a:ext cx="3200400" cy="457200"/>
+            <a:off x="6492240" y="2697480"/>
+            <a:ext cx="2011680" cy="365760"/>
           </a:xfrm>
           <a:prstGeom prst="rect">
             <a:avLst/>
@@ -5086,29 +6127,29 @@
           <a:lstStyle/>
           <a:p>
             <a:pPr algn="l">
-              <a:defRPr sz="1800" b="1">
-                <a:solidFill>
-                  <a:srgbClr val="7C6BE6"/>
-                </a:solidFill>
-                <a:latin typeface="Calibri"/>
-              </a:defRPr>
-            </a:pPr>
-            <a:r>
-              <a:t>Dataset</a:t>
-            </a:r>
-          </a:p>
-        </p:txBody>
-      </p:sp>
-      <p:sp>
-        <p:nvSpPr>
-          <p:cNvPr id="15" name="TextBox 14"/>
+              <a:defRPr sz="1400" b="1" i="0">
+                <a:solidFill>
+                  <a:srgbClr val="888899"/>
+                </a:solidFill>
+                <a:latin typeface="Calibri"/>
+              </a:defRPr>
+            </a:pPr>
+            <a:r>
+              <a:t>Before</a:t>
+            </a:r>
+          </a:p>
+        </p:txBody>
+      </p:sp>
+      <p:sp>
+        <p:nvSpPr>
+          <p:cNvPr id="21" name="TextBox 20"/>
           <p:cNvSpPr txBox="1"/>
           <p:nvPr/>
         </p:nvSpPr>
         <p:spPr>
           <a:xfrm>
-            <a:off x="4572000" y="4800600"/>
-            <a:ext cx="6400800" cy="457200"/>
+            <a:off x="8686800" y="2697480"/>
+            <a:ext cx="2286000" cy="365760"/>
           </a:xfrm>
           <a:prstGeom prst="rect">
             <a:avLst/>
@@ -5122,29 +6163,29 @@
           <a:lstStyle/>
           <a:p>
             <a:pPr algn="l">
-              <a:defRPr sz="1800" b="0">
-                <a:solidFill>
-                  <a:srgbClr val="FFFFFF"/>
-                </a:solidFill>
-                <a:latin typeface="Calibri"/>
-              </a:defRPr>
-            </a:pPr>
-            <a:r>
-              <a:t>DeepFashion In-Shop Clothes Retrieval (local subset)</a:t>
-            </a:r>
-          </a:p>
-        </p:txBody>
-      </p:sp>
-      <p:sp>
-        <p:nvSpPr>
-          <p:cNvPr id="16" name="TextBox 15"/>
+              <a:defRPr sz="1400" b="1" i="0">
+                <a:solidFill>
+                  <a:srgbClr val="00C9A7"/>
+                </a:solidFill>
+                <a:latin typeface="Calibri"/>
+              </a:defRPr>
+            </a:pPr>
+            <a:r>
+              <a:t>After</a:t>
+            </a:r>
+          </a:p>
+        </p:txBody>
+      </p:sp>
+      <p:sp>
+        <p:nvSpPr>
+          <p:cNvPr id="22" name="TextBox 21"/>
           <p:cNvSpPr txBox="1"/>
           <p:nvPr/>
         </p:nvSpPr>
         <p:spPr>
           <a:xfrm>
-            <a:off x="1371600" y="5394960"/>
-            <a:ext cx="3200400" cy="457200"/>
+            <a:off x="6492240" y="3108960"/>
+            <a:ext cx="1828800" cy="548640"/>
           </a:xfrm>
           <a:prstGeom prst="rect">
             <a:avLst/>
@@ -5158,29 +6199,29 @@
           <a:lstStyle/>
           <a:p>
             <a:pPr algn="l">
-              <a:defRPr sz="1800" b="1">
-                <a:solidFill>
-                  <a:srgbClr val="7C6BE6"/>
-                </a:solidFill>
-                <a:latin typeface="Calibri"/>
-              </a:defRPr>
-            </a:pPr>
-            <a:r>
-              <a:t>Language</a:t>
-            </a:r>
-          </a:p>
-        </p:txBody>
-      </p:sp>
-      <p:sp>
-        <p:nvSpPr>
-          <p:cNvPr id="17" name="TextBox 16"/>
+              <a:defRPr sz="1600" b="0" i="0">
+                <a:solidFill>
+                  <a:srgbClr val="888899"/>
+                </a:solidFill>
+                <a:latin typeface="Calibri"/>
+              </a:defRPr>
+            </a:pPr>
+            <a:r>
+              <a:t>NumPy dot product</a:t>
+            </a:r>
+          </a:p>
+        </p:txBody>
+      </p:sp>
+      <p:sp>
+        <p:nvSpPr>
+          <p:cNvPr id="23" name="TextBox 22"/>
           <p:cNvSpPr txBox="1"/>
           <p:nvPr/>
         </p:nvSpPr>
         <p:spPr>
           <a:xfrm>
-            <a:off x="4572000" y="5394960"/>
-            <a:ext cx="6400800" cy="457200"/>
+            <a:off x="8321040" y="3108960"/>
+            <a:ext cx="457200" cy="548640"/>
           </a:xfrm>
           <a:prstGeom prst="rect">
             <a:avLst/>
@@ -5193,16 +6234,202 @@
           </a:bodyPr>
           <a:lstStyle/>
           <a:p>
+            <a:pPr algn="ctr">
+              <a:defRPr sz="2000" b="0" i="0">
+                <a:solidFill>
+                  <a:srgbClr val="888899"/>
+                </a:solidFill>
+                <a:latin typeface="Calibri"/>
+              </a:defRPr>
+            </a:pPr>
+            <a:r>
+              <a:t>→</a:t>
+            </a:r>
+          </a:p>
+        </p:txBody>
+      </p:sp>
+      <p:sp>
+        <p:nvSpPr>
+          <p:cNvPr id="24" name="TextBox 23"/>
+          <p:cNvSpPr txBox="1"/>
+          <p:nvPr/>
+        </p:nvSpPr>
+        <p:spPr>
+          <a:xfrm>
+            <a:off x="8778240" y="3108960"/>
+            <a:ext cx="2286000" cy="548640"/>
+          </a:xfrm>
+          <a:prstGeom prst="rect">
+            <a:avLst/>
+          </a:prstGeom>
+          <a:noFill/>
+        </p:spPr>
+        <p:txBody>
+          <a:bodyPr wrap="square">
+            <a:spAutoFit/>
+          </a:bodyPr>
+          <a:lstStyle/>
+          <a:p>
             <a:pPr algn="l">
-              <a:defRPr sz="1800" b="0">
-                <a:solidFill>
-                  <a:srgbClr val="FFFFFF"/>
-                </a:solidFill>
-                <a:latin typeface="Calibri"/>
-              </a:defRPr>
-            </a:pPr>
-            <a:r>
-              <a:t>Python 3.10+</a:t>
+              <a:defRPr sz="1600" b="1" i="0">
+                <a:solidFill>
+                  <a:srgbClr val="00C9A7"/>
+                </a:solidFill>
+                <a:latin typeface="Calibri"/>
+              </a:defRPr>
+            </a:pPr>
+            <a:r>
+              <a:t>FAISS Index</a:t>
+            </a:r>
+          </a:p>
+        </p:txBody>
+      </p:sp>
+      <p:sp>
+        <p:nvSpPr>
+          <p:cNvPr id="25" name="TextBox 24"/>
+          <p:cNvSpPr txBox="1"/>
+          <p:nvPr/>
+        </p:nvSpPr>
+        <p:spPr>
+          <a:xfrm>
+            <a:off x="6492240" y="3749039"/>
+            <a:ext cx="4572000" cy="1371600"/>
+          </a:xfrm>
+          <a:prstGeom prst="rect">
+            <a:avLst/>
+          </a:prstGeom>
+          <a:noFill/>
+        </p:spPr>
+        <p:txBody>
+          <a:bodyPr wrap="square">
+            <a:spAutoFit/>
+          </a:bodyPr>
+          <a:lstStyle/>
+          <a:p>
+            <a:pPr>
+              <a:spcAft>
+                <a:spcPts val="800"/>
+              </a:spcAft>
+              <a:defRPr sz="1500">
+                <a:solidFill>
+                  <a:srgbClr val="E8E8E8"/>
+                </a:solidFill>
+                <a:latin typeface="Calibri"/>
+              </a:defRPr>
+            </a:pPr>
+            <a:r>
+              <a:t>  Brute-force → production vector search</a:t>
+            </a:r>
+          </a:p>
+          <a:p>
+            <a:pPr>
+              <a:spcAft>
+                <a:spcPts val="800"/>
+              </a:spcAft>
+              <a:defRPr sz="1500">
+                <a:solidFill>
+                  <a:srgbClr val="E8E8E8"/>
+                </a:solidFill>
+                <a:latin typeface="Calibri"/>
+              </a:defRPr>
+            </a:pPr>
+            <a:r>
+              <a:t>  Index saved to disk, loaded on reuse</a:t>
+            </a:r>
+          </a:p>
+          <a:p>
+            <a:pPr>
+              <a:spcAft>
+                <a:spcPts val="800"/>
+              </a:spcAft>
+              <a:defRPr sz="1500">
+                <a:solidFill>
+                  <a:srgbClr val="E8E8E8"/>
+                </a:solidFill>
+                <a:latin typeface="Calibri"/>
+              </a:defRPr>
+            </a:pPr>
+            <a:r>
+              <a:t>  Scales to any catalog size</a:t>
+            </a:r>
+          </a:p>
+        </p:txBody>
+      </p:sp>
+      <p:sp>
+        <p:nvSpPr>
+          <p:cNvPr id="26" name="Rectangle 25"/>
+          <p:cNvSpPr/>
+          <p:nvPr/>
+        </p:nvSpPr>
+        <p:spPr>
+          <a:xfrm>
+            <a:off x="731520" y="5806440"/>
+            <a:ext cx="10698480" cy="685800"/>
+          </a:xfrm>
+          <a:prstGeom prst="rect">
+            <a:avLst/>
+          </a:prstGeom>
+          <a:solidFill>
+            <a:srgbClr val="1A1A1A"/>
+          </a:solidFill>
+          <a:ln>
+            <a:noFill/>
+          </a:ln>
+        </p:spPr>
+        <p:style>
+          <a:lnRef idx="1">
+            <a:schemeClr val="accent1"/>
+          </a:lnRef>
+          <a:fillRef idx="3">
+            <a:schemeClr val="accent1"/>
+          </a:fillRef>
+          <a:effectRef idx="2">
+            <a:schemeClr val="accent1"/>
+          </a:effectRef>
+          <a:fontRef idx="minor">
+            <a:schemeClr val="lt1"/>
+          </a:fontRef>
+        </p:style>
+        <p:txBody>
+          <a:bodyPr rtlCol="0" anchor="ctr"/>
+          <a:lstStyle/>
+          <a:p>
+            <a:pPr algn="ctr"/>
+          </a:p>
+        </p:txBody>
+      </p:sp>
+      <p:sp>
+        <p:nvSpPr>
+          <p:cNvPr id="27" name="TextBox 26"/>
+          <p:cNvSpPr txBox="1"/>
+          <p:nvPr/>
+        </p:nvSpPr>
+        <p:spPr>
+          <a:xfrm>
+            <a:off x="1005840" y="5879592"/>
+            <a:ext cx="10149840" cy="548640"/>
+          </a:xfrm>
+          <a:prstGeom prst="rect">
+            <a:avLst/>
+          </a:prstGeom>
+          <a:noFill/>
+        </p:spPr>
+        <p:txBody>
+          <a:bodyPr wrap="square">
+            <a:spAutoFit/>
+          </a:bodyPr>
+          <a:lstStyle/>
+          <a:p>
+            <a:pPr algn="ctr">
+              <a:defRPr sz="2200" b="1" i="0">
+                <a:solidFill>
+                  <a:srgbClr val="FFD166"/>
+                </a:solidFill>
+                <a:latin typeface="Calibri"/>
+              </a:defRPr>
+            </a:pPr>
+            <a:r>
+              <a:t>"This moves the system from a prototype toward a real-world pipeline."</a:t>
             </a:r>
           </a:p>
         </p:txBody>
@@ -5221,7 +6448,7 @@
     <p:bg>
       <p:bgPr>
         <a:solidFill>
-          <a:srgbClr val="1A1A2E"/>
+          <a:srgbClr val="0F0F0F"/>
         </a:solidFill>
         <a:effectLst/>
       </p:bgPr>
@@ -5241,14 +6468,14 @@
         </p:nvSpPr>
         <p:spPr>
           <a:xfrm>
-            <a:off x="731520" y="731520"/>
-            <a:ext cx="73152" cy="548640"/>
+            <a:off x="0" y="0"/>
+            <a:ext cx="54864" cy="6858000"/>
           </a:xfrm>
           <a:prstGeom prst="rect">
             <a:avLst/>
           </a:prstGeom>
           <a:solidFill>
-            <a:srgbClr val="533CD0"/>
+            <a:srgbClr val="6C63FF"/>
           </a:solidFill>
           <a:ln>
             <a:noFill/>
@@ -5284,8 +6511,8 @@
         </p:nvSpPr>
         <p:spPr>
           <a:xfrm>
-            <a:off x="1005840" y="640080"/>
-            <a:ext cx="9144000" cy="731520"/>
+            <a:off x="822960" y="502920"/>
+            <a:ext cx="9144000" cy="640080"/>
           </a:xfrm>
           <a:prstGeom prst="rect">
             <a:avLst/>
@@ -5299,7 +6526,7 @@
           <a:lstStyle/>
           <a:p>
             <a:pPr algn="l">
-              <a:defRPr sz="3600" b="1">
+              <a:defRPr sz="3600" b="1" i="0">
                 <a:solidFill>
                   <a:srgbClr val="FFFFFF"/>
                 </a:solidFill>
@@ -5307,21 +6534,107 @@
               </a:defRPr>
             </a:pPr>
             <a:r>
-              <a:t>Development Stages</a:t>
-            </a:r>
-          </a:p>
-        </p:txBody>
-      </p:sp>
-      <p:sp>
-        <p:nvSpPr>
-          <p:cNvPr id="4" name="TextBox 3"/>
+              <a:t>How It Works</a:t>
+            </a:r>
+          </a:p>
+        </p:txBody>
+      </p:sp>
+      <p:sp>
+        <p:nvSpPr>
+          <p:cNvPr id="4" name="Rectangle 3"/>
+          <p:cNvSpPr/>
+          <p:nvPr/>
+        </p:nvSpPr>
+        <p:spPr>
+          <a:xfrm>
+            <a:off x="731520" y="1234440"/>
+            <a:ext cx="10698480" cy="36576"/>
+          </a:xfrm>
+          <a:prstGeom prst="rect">
+            <a:avLst/>
+          </a:prstGeom>
+          <a:solidFill>
+            <a:srgbClr val="6C63FF"/>
+          </a:solidFill>
+          <a:ln>
+            <a:noFill/>
+          </a:ln>
+        </p:spPr>
+        <p:style>
+          <a:lnRef idx="1">
+            <a:schemeClr val="accent1"/>
+          </a:lnRef>
+          <a:fillRef idx="3">
+            <a:schemeClr val="accent1"/>
+          </a:fillRef>
+          <a:effectRef idx="2">
+            <a:schemeClr val="accent1"/>
+          </a:effectRef>
+          <a:fontRef idx="minor">
+            <a:schemeClr val="lt1"/>
+          </a:fontRef>
+        </p:style>
+        <p:txBody>
+          <a:bodyPr rtlCol="0" anchor="ctr"/>
+          <a:lstStyle/>
+          <a:p>
+            <a:pPr algn="ctr"/>
+          </a:p>
+        </p:txBody>
+      </p:sp>
+      <p:sp>
+        <p:nvSpPr>
+          <p:cNvPr id="5" name="Rectangle 4"/>
+          <p:cNvSpPr/>
+          <p:nvPr/>
+        </p:nvSpPr>
+        <p:spPr>
+          <a:xfrm>
+            <a:off x="594360" y="2468880"/>
+            <a:ext cx="1737360" cy="1371600"/>
+          </a:xfrm>
+          <a:prstGeom prst="rect">
+            <a:avLst/>
+          </a:prstGeom>
+          <a:solidFill>
+            <a:srgbClr val="6C63FF"/>
+          </a:solidFill>
+          <a:ln>
+            <a:noFill/>
+          </a:ln>
+        </p:spPr>
+        <p:style>
+          <a:lnRef idx="1">
+            <a:schemeClr val="accent1"/>
+          </a:lnRef>
+          <a:fillRef idx="3">
+            <a:schemeClr val="accent1"/>
+          </a:fillRef>
+          <a:effectRef idx="2">
+            <a:schemeClr val="accent1"/>
+          </a:effectRef>
+          <a:fontRef idx="minor">
+            <a:schemeClr val="lt1"/>
+          </a:fontRef>
+        </p:style>
+        <p:txBody>
+          <a:bodyPr rtlCol="0" anchor="ctr"/>
+          <a:lstStyle/>
+          <a:p>
+            <a:pPr algn="ctr"/>
+          </a:p>
+        </p:txBody>
+      </p:sp>
+      <p:sp>
+        <p:nvSpPr>
+          <p:cNvPr id="6" name="TextBox 5"/>
           <p:cNvSpPr txBox="1"/>
           <p:nvPr/>
         </p:nvSpPr>
         <p:spPr>
           <a:xfrm>
-            <a:off x="1005840" y="1737360"/>
-            <a:ext cx="3200400" cy="457200"/>
+            <a:off x="685800" y="2606040"/>
+            <a:ext cx="1554480" cy="640080"/>
           </a:xfrm>
           <a:prstGeom prst="rect">
             <a:avLst/>
@@ -5334,30 +6647,34 @@
           </a:bodyPr>
           <a:lstStyle/>
           <a:p>
-            <a:pPr algn="l">
-              <a:defRPr sz="2000" b="1">
-                <a:solidFill>
-                  <a:srgbClr val="4EC9B0"/>
-                </a:solidFill>
-                <a:latin typeface="Calibri"/>
-              </a:defRPr>
-            </a:pPr>
-            <a:r>
-              <a:t>Stage 1: Baseline Retrieval</a:t>
-            </a:r>
-          </a:p>
-        </p:txBody>
-      </p:sp>
-      <p:sp>
-        <p:nvSpPr>
-          <p:cNvPr id="5" name="TextBox 4"/>
+            <a:pPr algn="ctr">
+              <a:defRPr sz="1700" b="1" i="0">
+                <a:solidFill>
+                  <a:srgbClr val="FFFFFF"/>
+                </a:solidFill>
+                <a:latin typeface="Calibri"/>
+              </a:defRPr>
+            </a:pPr>
+            <a:r>
+              <a:t>Upload</a:t>
+            </a:r>
+            <a:br/>
+            <a:r>
+              <a:t>Image</a:t>
+            </a:r>
+          </a:p>
+        </p:txBody>
+      </p:sp>
+      <p:sp>
+        <p:nvSpPr>
+          <p:cNvPr id="7" name="TextBox 6"/>
           <p:cNvSpPr txBox="1"/>
           <p:nvPr/>
         </p:nvSpPr>
         <p:spPr>
           <a:xfrm>
-            <a:off x="1005840" y="2286000"/>
-            <a:ext cx="3200400" cy="1828800"/>
+            <a:off x="640080" y="3337560"/>
+            <a:ext cx="1645920" cy="411480"/>
           </a:xfrm>
           <a:prstGeom prst="rect">
             <a:avLst/>
@@ -5370,81 +6687,30 @@
           </a:bodyPr>
           <a:lstStyle/>
           <a:p>
-            <a:pPr>
-              <a:spcAft>
-                <a:spcPts val="800"/>
-              </a:spcAft>
-              <a:defRPr sz="1500">
-                <a:solidFill>
-                  <a:srgbClr val="BBBBCC"/>
-                </a:solidFill>
-                <a:latin typeface="Calibri"/>
-              </a:defRPr>
-            </a:pPr>
-            <a:r>
-              <a:t>OpenAI CLIP embeddings</a:t>
-            </a:r>
-          </a:p>
-          <a:p>
-            <a:pPr>
-              <a:spcAft>
-                <a:spcPts val="800"/>
-              </a:spcAft>
-              <a:defRPr sz="1500">
-                <a:solidFill>
-                  <a:srgbClr val="BBBBCC"/>
-                </a:solidFill>
-                <a:latin typeface="Calibri"/>
-              </a:defRPr>
-            </a:pPr>
-            <a:r>
-              <a:t>Brute-force cosine similarity</a:t>
-            </a:r>
-          </a:p>
-          <a:p>
-            <a:pPr>
-              <a:spcAft>
-                <a:spcPts val="800"/>
-              </a:spcAft>
-              <a:defRPr sz="1500">
-                <a:solidFill>
-                  <a:srgbClr val="BBBBCC"/>
-                </a:solidFill>
-                <a:latin typeface="Calibri"/>
-              </a:defRPr>
-            </a:pPr>
-            <a:r>
-              <a:t>Streamlit web demo</a:t>
-            </a:r>
-          </a:p>
-          <a:p>
-            <a:pPr>
-              <a:spcAft>
-                <a:spcPts val="800"/>
-              </a:spcAft>
-              <a:defRPr sz="1500">
-                <a:solidFill>
-                  <a:srgbClr val="BBBBCC"/>
-                </a:solidFill>
-                <a:latin typeface="Calibri"/>
-              </a:defRPr>
-            </a:pPr>
-            <a:r>
-              <a:t>Good on broad categories</a:t>
-            </a:r>
-          </a:p>
-        </p:txBody>
-      </p:sp>
-      <p:sp>
-        <p:nvSpPr>
-          <p:cNvPr id="6" name="TextBox 5"/>
+            <a:pPr algn="ctr">
+              <a:defRPr sz="1200" b="0" i="0">
+                <a:solidFill>
+                  <a:srgbClr val="CCCCCC"/>
+                </a:solidFill>
+                <a:latin typeface="Calibri"/>
+              </a:defRPr>
+            </a:pPr>
+            <a:r>
+              <a:t>Streamlit UI</a:t>
+            </a:r>
+          </a:p>
+        </p:txBody>
+      </p:sp>
+      <p:sp>
+        <p:nvSpPr>
+          <p:cNvPr id="8" name="TextBox 7"/>
           <p:cNvSpPr txBox="1"/>
           <p:nvPr/>
         </p:nvSpPr>
         <p:spPr>
           <a:xfrm>
-            <a:off x="4572000" y="1737360"/>
-            <a:ext cx="3200400" cy="457200"/>
+            <a:off x="2423160" y="2880360"/>
+            <a:ext cx="292608" cy="548640"/>
           </a:xfrm>
           <a:prstGeom prst="rect">
             <a:avLst/>
@@ -5457,30 +6723,73 @@
           </a:bodyPr>
           <a:lstStyle/>
           <a:p>
-            <a:pPr algn="l">
-              <a:defRPr sz="2000" b="1">
-                <a:solidFill>
-                  <a:srgbClr val="E09F3E"/>
-                </a:solidFill>
-                <a:latin typeface="Calibri"/>
-              </a:defRPr>
-            </a:pPr>
-            <a:r>
-              <a:t>Stage 2: Preference Reranking</a:t>
-            </a:r>
-          </a:p>
-        </p:txBody>
-      </p:sp>
-      <p:sp>
-        <p:nvSpPr>
-          <p:cNvPr id="7" name="TextBox 6"/>
+            <a:pPr algn="ctr">
+              <a:defRPr sz="2600" b="0" i="0">
+                <a:solidFill>
+                  <a:srgbClr val="888899"/>
+                </a:solidFill>
+                <a:latin typeface="Calibri"/>
+              </a:defRPr>
+            </a:pPr>
+            <a:r>
+              <a:t>→</a:t>
+            </a:r>
+          </a:p>
+        </p:txBody>
+      </p:sp>
+      <p:sp>
+        <p:nvSpPr>
+          <p:cNvPr id="9" name="Rectangle 8"/>
+          <p:cNvSpPr/>
+          <p:nvPr/>
+        </p:nvSpPr>
+        <p:spPr>
+          <a:xfrm>
+            <a:off x="2807208" y="2468880"/>
+            <a:ext cx="1737360" cy="1371600"/>
+          </a:xfrm>
+          <a:prstGeom prst="rect">
+            <a:avLst/>
+          </a:prstGeom>
+          <a:solidFill>
+            <a:srgbClr val="3A3A7A"/>
+          </a:solidFill>
+          <a:ln>
+            <a:noFill/>
+          </a:ln>
+        </p:spPr>
+        <p:style>
+          <a:lnRef idx="1">
+            <a:schemeClr val="accent1"/>
+          </a:lnRef>
+          <a:fillRef idx="3">
+            <a:schemeClr val="accent1"/>
+          </a:fillRef>
+          <a:effectRef idx="2">
+            <a:schemeClr val="accent1"/>
+          </a:effectRef>
+          <a:fontRef idx="minor">
+            <a:schemeClr val="lt1"/>
+          </a:fontRef>
+        </p:style>
+        <p:txBody>
+          <a:bodyPr rtlCol="0" anchor="ctr"/>
+          <a:lstStyle/>
+          <a:p>
+            <a:pPr algn="ctr"/>
+          </a:p>
+        </p:txBody>
+      </p:sp>
+      <p:sp>
+        <p:nvSpPr>
+          <p:cNvPr id="10" name="TextBox 9"/>
           <p:cNvSpPr txBox="1"/>
           <p:nvPr/>
         </p:nvSpPr>
         <p:spPr>
           <a:xfrm>
-            <a:off x="4572000" y="2286000"/>
-            <a:ext cx="3200400" cy="1828800"/>
+            <a:off x="2898648" y="2606040"/>
+            <a:ext cx="1554480" cy="640080"/>
           </a:xfrm>
           <a:prstGeom prst="rect">
             <a:avLst/>
@@ -5493,81 +6802,34 @@
           </a:bodyPr>
           <a:lstStyle/>
           <a:p>
-            <a:pPr>
-              <a:spcAft>
-                <a:spcPts val="800"/>
-              </a:spcAft>
-              <a:defRPr sz="1500">
-                <a:solidFill>
-                  <a:srgbClr val="BBBBCC"/>
-                </a:solidFill>
-                <a:latin typeface="Calibri"/>
-              </a:defRPr>
-            </a:pPr>
-            <a:r>
-              <a:t>Style/fit/avoid UI controls</a:t>
-            </a:r>
-          </a:p>
-          <a:p>
-            <a:pPr>
-              <a:spcAft>
-                <a:spcPts val="800"/>
-              </a:spcAft>
-              <a:defRPr sz="1500">
-                <a:solidFill>
-                  <a:srgbClr val="BBBBCC"/>
-                </a:solidFill>
-                <a:latin typeface="Calibri"/>
-              </a:defRPr>
-            </a:pPr>
-            <a:r>
-              <a:t>Free-text preference parsing</a:t>
-            </a:r>
-          </a:p>
-          <a:p>
-            <a:pPr>
-              <a:spcAft>
-                <a:spcPts val="800"/>
-              </a:spcAft>
-              <a:defRPr sz="1500">
-                <a:solidFill>
-                  <a:srgbClr val="BBBBCC"/>
-                </a:solidFill>
-                <a:latin typeface="Calibri"/>
-              </a:defRPr>
-            </a:pPr>
-            <a:r>
-              <a:t>Text-based reranking scores</a:t>
-            </a:r>
-          </a:p>
-          <a:p>
-            <a:pPr>
-              <a:spcAft>
-                <a:spcPts val="800"/>
-              </a:spcAft>
-              <a:defRPr sz="1500">
-                <a:solidFill>
-                  <a:srgbClr val="BBBBCC"/>
-                </a:solidFill>
-                <a:latin typeface="Calibri"/>
-              </a:defRPr>
-            </a:pPr>
-            <a:r>
-              <a:t>Users can steer results</a:t>
-            </a:r>
-          </a:p>
-        </p:txBody>
-      </p:sp>
-      <p:sp>
-        <p:nvSpPr>
-          <p:cNvPr id="8" name="TextBox 7"/>
+            <a:pPr algn="ctr">
+              <a:defRPr sz="1700" b="1" i="0">
+                <a:solidFill>
+                  <a:srgbClr val="FFFFFF"/>
+                </a:solidFill>
+                <a:latin typeface="Calibri"/>
+              </a:defRPr>
+            </a:pPr>
+            <a:r>
+              <a:t>FashionCLIP</a:t>
+            </a:r>
+            <a:br/>
+            <a:r>
+              <a:t>Encoder</a:t>
+            </a:r>
+          </a:p>
+        </p:txBody>
+      </p:sp>
+      <p:sp>
+        <p:nvSpPr>
+          <p:cNvPr id="11" name="TextBox 10"/>
           <p:cNvSpPr txBox="1"/>
           <p:nvPr/>
         </p:nvSpPr>
         <p:spPr>
           <a:xfrm>
-            <a:off x="8138160" y="1737360"/>
-            <a:ext cx="3474720" cy="457200"/>
+            <a:off x="2852928" y="3337560"/>
+            <a:ext cx="1645920" cy="411480"/>
           </a:xfrm>
           <a:prstGeom prst="rect">
             <a:avLst/>
@@ -5580,30 +6842,30 @@
           </a:bodyPr>
           <a:lstStyle/>
           <a:p>
-            <a:pPr algn="l">
-              <a:defRPr sz="2000" b="1">
-                <a:solidFill>
-                  <a:srgbClr val="7C6BE6"/>
-                </a:solidFill>
-                <a:latin typeface="Calibri"/>
-              </a:defRPr>
-            </a:pPr>
-            <a:r>
-              <a:t>Stage 3: FashionCLIP + FAISS</a:t>
-            </a:r>
-          </a:p>
-        </p:txBody>
-      </p:sp>
-      <p:sp>
-        <p:nvSpPr>
-          <p:cNvPr id="9" name="TextBox 8"/>
+            <a:pPr algn="ctr">
+              <a:defRPr sz="1200" b="0" i="0">
+                <a:solidFill>
+                  <a:srgbClr val="CCCCCC"/>
+                </a:solidFill>
+                <a:latin typeface="Calibri"/>
+              </a:defRPr>
+            </a:pPr>
+            <a:r>
+              <a:t>512-dim embedding</a:t>
+            </a:r>
+          </a:p>
+        </p:txBody>
+      </p:sp>
+      <p:sp>
+        <p:nvSpPr>
+          <p:cNvPr id="12" name="TextBox 11"/>
           <p:cNvSpPr txBox="1"/>
           <p:nvPr/>
         </p:nvSpPr>
         <p:spPr>
           <a:xfrm>
-            <a:off x="8138160" y="2286000"/>
-            <a:ext cx="3474720" cy="1828800"/>
+            <a:off x="4636008" y="2880360"/>
+            <a:ext cx="292608" cy="548640"/>
           </a:xfrm>
           <a:prstGeom prst="rect">
             <a:avLst/>
@@ -5616,67 +6878,645 @@
           </a:bodyPr>
           <a:lstStyle/>
           <a:p>
-            <a:pPr>
-              <a:spcAft>
-                <a:spcPts val="800"/>
-              </a:spcAft>
-              <a:defRPr sz="1500">
-                <a:solidFill>
-                  <a:srgbClr val="BBBBCC"/>
-                </a:solidFill>
-                <a:latin typeface="Calibri"/>
-              </a:defRPr>
-            </a:pPr>
-            <a:r>
-              <a:t>Fashion-specific embeddings</a:t>
-            </a:r>
-          </a:p>
-          <a:p>
-            <a:pPr>
-              <a:spcAft>
-                <a:spcPts val="800"/>
-              </a:spcAft>
-              <a:defRPr sz="1500">
-                <a:solidFill>
-                  <a:srgbClr val="BBBBCC"/>
-                </a:solidFill>
-                <a:latin typeface="Calibri"/>
-              </a:defRPr>
-            </a:pPr>
-            <a:r>
-              <a:t>FAISS vector search index</a:t>
-            </a:r>
-          </a:p>
-          <a:p>
-            <a:pPr>
-              <a:spcAft>
-                <a:spcPts val="800"/>
-              </a:spcAft>
-              <a:defRPr sz="1500">
-                <a:solidFill>
-                  <a:srgbClr val="BBBBCC"/>
-                </a:solidFill>
-                <a:latin typeface="Calibri"/>
-              </a:defRPr>
-            </a:pPr>
-            <a:r>
-              <a:t>Shared model loader</a:t>
-            </a:r>
-          </a:p>
-          <a:p>
-            <a:pPr>
-              <a:spcAft>
-                <a:spcPts val="800"/>
-              </a:spcAft>
-              <a:defRPr sz="1500">
-                <a:solidFill>
-                  <a:srgbClr val="BBBBCC"/>
-                </a:solidFill>
-                <a:latin typeface="Calibri"/>
-              </a:defRPr>
-            </a:pPr>
-            <a:r>
-              <a:t>Production-grade retrieval</a:t>
+            <a:pPr algn="ctr">
+              <a:defRPr sz="2600" b="0" i="0">
+                <a:solidFill>
+                  <a:srgbClr val="888899"/>
+                </a:solidFill>
+                <a:latin typeface="Calibri"/>
+              </a:defRPr>
+            </a:pPr>
+            <a:r>
+              <a:t>→</a:t>
+            </a:r>
+          </a:p>
+        </p:txBody>
+      </p:sp>
+      <p:sp>
+        <p:nvSpPr>
+          <p:cNvPr id="13" name="Rectangle 12"/>
+          <p:cNvSpPr/>
+          <p:nvPr/>
+        </p:nvSpPr>
+        <p:spPr>
+          <a:xfrm>
+            <a:off x="5020056" y="2468880"/>
+            <a:ext cx="1737360" cy="1371600"/>
+          </a:xfrm>
+          <a:prstGeom prst="rect">
+            <a:avLst/>
+          </a:prstGeom>
+          <a:solidFill>
+            <a:srgbClr val="1A5A4A"/>
+          </a:solidFill>
+          <a:ln>
+            <a:noFill/>
+          </a:ln>
+        </p:spPr>
+        <p:style>
+          <a:lnRef idx="1">
+            <a:schemeClr val="accent1"/>
+          </a:lnRef>
+          <a:fillRef idx="3">
+            <a:schemeClr val="accent1"/>
+          </a:fillRef>
+          <a:effectRef idx="2">
+            <a:schemeClr val="accent1"/>
+          </a:effectRef>
+          <a:fontRef idx="minor">
+            <a:schemeClr val="lt1"/>
+          </a:fontRef>
+        </p:style>
+        <p:txBody>
+          <a:bodyPr rtlCol="0" anchor="ctr"/>
+          <a:lstStyle/>
+          <a:p>
+            <a:pPr algn="ctr"/>
+          </a:p>
+        </p:txBody>
+      </p:sp>
+      <p:sp>
+        <p:nvSpPr>
+          <p:cNvPr id="14" name="TextBox 13"/>
+          <p:cNvSpPr txBox="1"/>
+          <p:nvPr/>
+        </p:nvSpPr>
+        <p:spPr>
+          <a:xfrm>
+            <a:off x="5111496" y="2606040"/>
+            <a:ext cx="1554480" cy="640080"/>
+          </a:xfrm>
+          <a:prstGeom prst="rect">
+            <a:avLst/>
+          </a:prstGeom>
+          <a:noFill/>
+        </p:spPr>
+        <p:txBody>
+          <a:bodyPr wrap="square">
+            <a:spAutoFit/>
+          </a:bodyPr>
+          <a:lstStyle/>
+          <a:p>
+            <a:pPr algn="ctr">
+              <a:defRPr sz="1700" b="1" i="0">
+                <a:solidFill>
+                  <a:srgbClr val="FFFFFF"/>
+                </a:solidFill>
+                <a:latin typeface="Calibri"/>
+              </a:defRPr>
+            </a:pPr>
+            <a:r>
+              <a:t>FAISS</a:t>
+            </a:r>
+            <a:br/>
+            <a:r>
+              <a:t>Search</a:t>
+            </a:r>
+          </a:p>
+        </p:txBody>
+      </p:sp>
+      <p:sp>
+        <p:nvSpPr>
+          <p:cNvPr id="15" name="TextBox 14"/>
+          <p:cNvSpPr txBox="1"/>
+          <p:nvPr/>
+        </p:nvSpPr>
+        <p:spPr>
+          <a:xfrm>
+            <a:off x="5065776" y="3337560"/>
+            <a:ext cx="1645920" cy="411480"/>
+          </a:xfrm>
+          <a:prstGeom prst="rect">
+            <a:avLst/>
+          </a:prstGeom>
+          <a:noFill/>
+        </p:spPr>
+        <p:txBody>
+          <a:bodyPr wrap="square">
+            <a:spAutoFit/>
+          </a:bodyPr>
+          <a:lstStyle/>
+          <a:p>
+            <a:pPr algn="ctr">
+              <a:defRPr sz="1200" b="0" i="0">
+                <a:solidFill>
+                  <a:srgbClr val="CCCCCC"/>
+                </a:solidFill>
+                <a:latin typeface="Calibri"/>
+              </a:defRPr>
+            </a:pPr>
+            <a:r>
+              <a:t>Top-5 neighbors</a:t>
+            </a:r>
+          </a:p>
+        </p:txBody>
+      </p:sp>
+      <p:sp>
+        <p:nvSpPr>
+          <p:cNvPr id="16" name="TextBox 15"/>
+          <p:cNvSpPr txBox="1"/>
+          <p:nvPr/>
+        </p:nvSpPr>
+        <p:spPr>
+          <a:xfrm>
+            <a:off x="6848856" y="2880360"/>
+            <a:ext cx="292608" cy="548640"/>
+          </a:xfrm>
+          <a:prstGeom prst="rect">
+            <a:avLst/>
+          </a:prstGeom>
+          <a:noFill/>
+        </p:spPr>
+        <p:txBody>
+          <a:bodyPr wrap="square">
+            <a:spAutoFit/>
+          </a:bodyPr>
+          <a:lstStyle/>
+          <a:p>
+            <a:pPr algn="ctr">
+              <a:defRPr sz="2600" b="0" i="0">
+                <a:solidFill>
+                  <a:srgbClr val="888899"/>
+                </a:solidFill>
+                <a:latin typeface="Calibri"/>
+              </a:defRPr>
+            </a:pPr>
+            <a:r>
+              <a:t>→</a:t>
+            </a:r>
+          </a:p>
+        </p:txBody>
+      </p:sp>
+      <p:sp>
+        <p:nvSpPr>
+          <p:cNvPr id="17" name="Rectangle 16"/>
+          <p:cNvSpPr/>
+          <p:nvPr/>
+        </p:nvSpPr>
+        <p:spPr>
+          <a:xfrm>
+            <a:off x="7232904" y="2468880"/>
+            <a:ext cx="1737360" cy="1371600"/>
+          </a:xfrm>
+          <a:prstGeom prst="rect">
+            <a:avLst/>
+          </a:prstGeom>
+          <a:solidFill>
+            <a:srgbClr val="5A4A1A"/>
+          </a:solidFill>
+          <a:ln>
+            <a:noFill/>
+          </a:ln>
+        </p:spPr>
+        <p:style>
+          <a:lnRef idx="1">
+            <a:schemeClr val="accent1"/>
+          </a:lnRef>
+          <a:fillRef idx="3">
+            <a:schemeClr val="accent1"/>
+          </a:fillRef>
+          <a:effectRef idx="2">
+            <a:schemeClr val="accent1"/>
+          </a:effectRef>
+          <a:fontRef idx="minor">
+            <a:schemeClr val="lt1"/>
+          </a:fontRef>
+        </p:style>
+        <p:txBody>
+          <a:bodyPr rtlCol="0" anchor="ctr"/>
+          <a:lstStyle/>
+          <a:p>
+            <a:pPr algn="ctr"/>
+          </a:p>
+        </p:txBody>
+      </p:sp>
+      <p:sp>
+        <p:nvSpPr>
+          <p:cNvPr id="18" name="TextBox 17"/>
+          <p:cNvSpPr txBox="1"/>
+          <p:nvPr/>
+        </p:nvSpPr>
+        <p:spPr>
+          <a:xfrm>
+            <a:off x="7324344" y="2606040"/>
+            <a:ext cx="1554480" cy="640080"/>
+          </a:xfrm>
+          <a:prstGeom prst="rect">
+            <a:avLst/>
+          </a:prstGeom>
+          <a:noFill/>
+        </p:spPr>
+        <p:txBody>
+          <a:bodyPr wrap="square">
+            <a:spAutoFit/>
+          </a:bodyPr>
+          <a:lstStyle/>
+          <a:p>
+            <a:pPr algn="ctr">
+              <a:defRPr sz="1700" b="1" i="0">
+                <a:solidFill>
+                  <a:srgbClr val="FFFFFF"/>
+                </a:solidFill>
+                <a:latin typeface="Calibri"/>
+              </a:defRPr>
+            </a:pPr>
+            <a:r>
+              <a:t>Preference</a:t>
+            </a:r>
+            <a:br/>
+            <a:r>
+              <a:t>Reranking</a:t>
+            </a:r>
+          </a:p>
+        </p:txBody>
+      </p:sp>
+      <p:sp>
+        <p:nvSpPr>
+          <p:cNvPr id="19" name="TextBox 18"/>
+          <p:cNvSpPr txBox="1"/>
+          <p:nvPr/>
+        </p:nvSpPr>
+        <p:spPr>
+          <a:xfrm>
+            <a:off x="7278624" y="3337560"/>
+            <a:ext cx="1645920" cy="411480"/>
+          </a:xfrm>
+          <a:prstGeom prst="rect">
+            <a:avLst/>
+          </a:prstGeom>
+          <a:noFill/>
+        </p:spPr>
+        <p:txBody>
+          <a:bodyPr wrap="square">
+            <a:spAutoFit/>
+          </a:bodyPr>
+          <a:lstStyle/>
+          <a:p>
+            <a:pPr algn="ctr">
+              <a:defRPr sz="1200" b="0" i="0">
+                <a:solidFill>
+                  <a:srgbClr val="CCCCCC"/>
+                </a:solidFill>
+                <a:latin typeface="Calibri"/>
+              </a:defRPr>
+            </a:pPr>
+            <a:r>
+              <a:t>Goal / Avoid scoring</a:t>
+            </a:r>
+          </a:p>
+        </p:txBody>
+      </p:sp>
+      <p:sp>
+        <p:nvSpPr>
+          <p:cNvPr id="20" name="TextBox 19"/>
+          <p:cNvSpPr txBox="1"/>
+          <p:nvPr/>
+        </p:nvSpPr>
+        <p:spPr>
+          <a:xfrm>
+            <a:off x="9061704" y="2880360"/>
+            <a:ext cx="292608" cy="548640"/>
+          </a:xfrm>
+          <a:prstGeom prst="rect">
+            <a:avLst/>
+          </a:prstGeom>
+          <a:noFill/>
+        </p:spPr>
+        <p:txBody>
+          <a:bodyPr wrap="square">
+            <a:spAutoFit/>
+          </a:bodyPr>
+          <a:lstStyle/>
+          <a:p>
+            <a:pPr algn="ctr">
+              <a:defRPr sz="2600" b="0" i="0">
+                <a:solidFill>
+                  <a:srgbClr val="888899"/>
+                </a:solidFill>
+                <a:latin typeface="Calibri"/>
+              </a:defRPr>
+            </a:pPr>
+            <a:r>
+              <a:t>→</a:t>
+            </a:r>
+          </a:p>
+        </p:txBody>
+      </p:sp>
+      <p:sp>
+        <p:nvSpPr>
+          <p:cNvPr id="21" name="Rectangle 20"/>
+          <p:cNvSpPr/>
+          <p:nvPr/>
+        </p:nvSpPr>
+        <p:spPr>
+          <a:xfrm>
+            <a:off x="9445752" y="2468880"/>
+            <a:ext cx="1737360" cy="1371600"/>
+          </a:xfrm>
+          <a:prstGeom prst="rect">
+            <a:avLst/>
+          </a:prstGeom>
+          <a:solidFill>
+            <a:srgbClr val="00C9A7"/>
+          </a:solidFill>
+          <a:ln>
+            <a:noFill/>
+          </a:ln>
+        </p:spPr>
+        <p:style>
+          <a:lnRef idx="1">
+            <a:schemeClr val="accent1"/>
+          </a:lnRef>
+          <a:fillRef idx="3">
+            <a:schemeClr val="accent1"/>
+          </a:fillRef>
+          <a:effectRef idx="2">
+            <a:schemeClr val="accent1"/>
+          </a:effectRef>
+          <a:fontRef idx="minor">
+            <a:schemeClr val="lt1"/>
+          </a:fontRef>
+        </p:style>
+        <p:txBody>
+          <a:bodyPr rtlCol="0" anchor="ctr"/>
+          <a:lstStyle/>
+          <a:p>
+            <a:pPr algn="ctr"/>
+          </a:p>
+        </p:txBody>
+      </p:sp>
+      <p:sp>
+        <p:nvSpPr>
+          <p:cNvPr id="22" name="TextBox 21"/>
+          <p:cNvSpPr txBox="1"/>
+          <p:nvPr/>
+        </p:nvSpPr>
+        <p:spPr>
+          <a:xfrm>
+            <a:off x="9537192" y="2606040"/>
+            <a:ext cx="1554480" cy="640080"/>
+          </a:xfrm>
+          <a:prstGeom prst="rect">
+            <a:avLst/>
+          </a:prstGeom>
+          <a:noFill/>
+        </p:spPr>
+        <p:txBody>
+          <a:bodyPr wrap="square">
+            <a:spAutoFit/>
+          </a:bodyPr>
+          <a:lstStyle/>
+          <a:p>
+            <a:pPr algn="ctr">
+              <a:defRPr sz="1700" b="1" i="0">
+                <a:solidFill>
+                  <a:srgbClr val="FFFFFF"/>
+                </a:solidFill>
+                <a:latin typeface="Calibri"/>
+              </a:defRPr>
+            </a:pPr>
+            <a:r>
+              <a:t>Results</a:t>
+            </a:r>
+            <a:br/>
+            <a:r>
+              <a:t>Display</a:t>
+            </a:r>
+          </a:p>
+        </p:txBody>
+      </p:sp>
+      <p:sp>
+        <p:nvSpPr>
+          <p:cNvPr id="23" name="TextBox 22"/>
+          <p:cNvSpPr txBox="1"/>
+          <p:nvPr/>
+        </p:nvSpPr>
+        <p:spPr>
+          <a:xfrm>
+            <a:off x="9491472" y="3337560"/>
+            <a:ext cx="1645920" cy="411480"/>
+          </a:xfrm>
+          <a:prstGeom prst="rect">
+            <a:avLst/>
+          </a:prstGeom>
+          <a:noFill/>
+        </p:spPr>
+        <p:txBody>
+          <a:bodyPr wrap="square">
+            <a:spAutoFit/>
+          </a:bodyPr>
+          <a:lstStyle/>
+          <a:p>
+            <a:pPr algn="ctr">
+              <a:defRPr sz="1200" b="0" i="0">
+                <a:solidFill>
+                  <a:srgbClr val="CCCCCC"/>
+                </a:solidFill>
+                <a:latin typeface="Calibri"/>
+              </a:defRPr>
+            </a:pPr>
+            <a:r>
+              <a:t>Baseline + Reranked</a:t>
+            </a:r>
+          </a:p>
+        </p:txBody>
+      </p:sp>
+      <p:sp>
+        <p:nvSpPr>
+          <p:cNvPr id="24" name="TextBox 23"/>
+          <p:cNvSpPr txBox="1"/>
+          <p:nvPr/>
+        </p:nvSpPr>
+        <p:spPr>
+          <a:xfrm>
+            <a:off x="594360" y="4023360"/>
+            <a:ext cx="1737360" cy="640080"/>
+          </a:xfrm>
+          <a:prstGeom prst="rect">
+            <a:avLst/>
+          </a:prstGeom>
+          <a:noFill/>
+        </p:spPr>
+        <p:txBody>
+          <a:bodyPr wrap="square">
+            <a:spAutoFit/>
+          </a:bodyPr>
+          <a:lstStyle/>
+          <a:p>
+            <a:pPr algn="ctr">
+              <a:defRPr sz="1300" b="0" i="0">
+                <a:solidFill>
+                  <a:srgbClr val="888899"/>
+                </a:solidFill>
+                <a:latin typeface="Calibri"/>
+              </a:defRPr>
+            </a:pPr>
+            <a:r>
+              <a:t>User uploads a</a:t>
+            </a:r>
+            <a:br/>
+            <a:r>
+              <a:t>clothing photo</a:t>
+            </a:r>
+          </a:p>
+        </p:txBody>
+      </p:sp>
+      <p:sp>
+        <p:nvSpPr>
+          <p:cNvPr id="25" name="TextBox 24"/>
+          <p:cNvSpPr txBox="1"/>
+          <p:nvPr/>
+        </p:nvSpPr>
+        <p:spPr>
+          <a:xfrm>
+            <a:off x="2807208" y="4023360"/>
+            <a:ext cx="1737360" cy="640080"/>
+          </a:xfrm>
+          <a:prstGeom prst="rect">
+            <a:avLst/>
+          </a:prstGeom>
+          <a:noFill/>
+        </p:spPr>
+        <p:txBody>
+          <a:bodyPr wrap="square">
+            <a:spAutoFit/>
+          </a:bodyPr>
+          <a:lstStyle/>
+          <a:p>
+            <a:pPr algn="ctr">
+              <a:defRPr sz="1300" b="0" i="0">
+                <a:solidFill>
+                  <a:srgbClr val="888899"/>
+                </a:solidFill>
+                <a:latin typeface="Calibri"/>
+              </a:defRPr>
+            </a:pPr>
+            <a:r>
+              <a:t>Image converted to</a:t>
+            </a:r>
+            <a:br/>
+            <a:r>
+              <a:t>numerical embedding</a:t>
+            </a:r>
+          </a:p>
+        </p:txBody>
+      </p:sp>
+      <p:sp>
+        <p:nvSpPr>
+          <p:cNvPr id="26" name="TextBox 25"/>
+          <p:cNvSpPr txBox="1"/>
+          <p:nvPr/>
+        </p:nvSpPr>
+        <p:spPr>
+          <a:xfrm>
+            <a:off x="5020056" y="4023360"/>
+            <a:ext cx="1737360" cy="640080"/>
+          </a:xfrm>
+          <a:prstGeom prst="rect">
+            <a:avLst/>
+          </a:prstGeom>
+          <a:noFill/>
+        </p:spPr>
+        <p:txBody>
+          <a:bodyPr wrap="square">
+            <a:spAutoFit/>
+          </a:bodyPr>
+          <a:lstStyle/>
+          <a:p>
+            <a:pPr algn="ctr">
+              <a:defRPr sz="1300" b="0" i="0">
+                <a:solidFill>
+                  <a:srgbClr val="888899"/>
+                </a:solidFill>
+                <a:latin typeface="Calibri"/>
+              </a:defRPr>
+            </a:pPr>
+            <a:r>
+              <a:t>Nearest catalog</a:t>
+            </a:r>
+            <a:br/>
+            <a:r>
+              <a:t>items retrieved</a:t>
+            </a:r>
+          </a:p>
+        </p:txBody>
+      </p:sp>
+      <p:sp>
+        <p:nvSpPr>
+          <p:cNvPr id="27" name="TextBox 26"/>
+          <p:cNvSpPr txBox="1"/>
+          <p:nvPr/>
+        </p:nvSpPr>
+        <p:spPr>
+          <a:xfrm>
+            <a:off x="7232904" y="4023360"/>
+            <a:ext cx="1737360" cy="640080"/>
+          </a:xfrm>
+          <a:prstGeom prst="rect">
+            <a:avLst/>
+          </a:prstGeom>
+          <a:noFill/>
+        </p:spPr>
+        <p:txBody>
+          <a:bodyPr wrap="square">
+            <a:spAutoFit/>
+          </a:bodyPr>
+          <a:lstStyle/>
+          <a:p>
+            <a:pPr algn="ctr">
+              <a:defRPr sz="1300" b="0" i="0">
+                <a:solidFill>
+                  <a:srgbClr val="888899"/>
+                </a:solidFill>
+                <a:latin typeface="Calibri"/>
+              </a:defRPr>
+            </a:pPr>
+            <a:r>
+              <a:t>Style preferences</a:t>
+            </a:r>
+            <a:br/>
+            <a:r>
+              <a:t>applied to scores</a:t>
+            </a:r>
+          </a:p>
+        </p:txBody>
+      </p:sp>
+      <p:sp>
+        <p:nvSpPr>
+          <p:cNvPr id="28" name="TextBox 27"/>
+          <p:cNvSpPr txBox="1"/>
+          <p:nvPr/>
+        </p:nvSpPr>
+        <p:spPr>
+          <a:xfrm>
+            <a:off x="9445752" y="4023360"/>
+            <a:ext cx="1737360" cy="640080"/>
+          </a:xfrm>
+          <a:prstGeom prst="rect">
+            <a:avLst/>
+          </a:prstGeom>
+          <a:noFill/>
+        </p:spPr>
+        <p:txBody>
+          <a:bodyPr wrap="square">
+            <a:spAutoFit/>
+          </a:bodyPr>
+          <a:lstStyle/>
+          <a:p>
+            <a:pPr algn="ctr">
+              <a:defRPr sz="1300" b="0" i="0">
+                <a:solidFill>
+                  <a:srgbClr val="888899"/>
+                </a:solidFill>
+                <a:latin typeface="Calibri"/>
+              </a:defRPr>
+            </a:pPr>
+            <a:r>
+              <a:t>Both views shown</a:t>
+            </a:r>
+            <a:br/>
+            <a:r>
+              <a:t>side by side</a:t>
             </a:r>
           </a:p>
         </p:txBody>
@@ -5695,7 +7535,7 @@
     <p:bg>
       <p:bgPr>
         <a:solidFill>
-          <a:srgbClr val="1A1A2E"/>
+          <a:srgbClr val="0F0F0F"/>
         </a:solidFill>
         <a:effectLst/>
       </p:bgPr>
@@ -5715,14 +7555,14 @@
         </p:nvSpPr>
         <p:spPr>
           <a:xfrm>
-            <a:off x="731520" y="731520"/>
-            <a:ext cx="73152" cy="548640"/>
+            <a:off x="0" y="0"/>
+            <a:ext cx="54864" cy="6858000"/>
           </a:xfrm>
           <a:prstGeom prst="rect">
             <a:avLst/>
           </a:prstGeom>
           <a:solidFill>
-            <a:srgbClr val="533CD0"/>
+            <a:srgbClr val="FFD166"/>
           </a:solidFill>
           <a:ln>
             <a:noFill/>
@@ -5758,8 +7598,8 @@
         </p:nvSpPr>
         <p:spPr>
           <a:xfrm>
-            <a:off x="1005840" y="640080"/>
-            <a:ext cx="9144000" cy="731520"/>
+            <a:off x="822960" y="502920"/>
+            <a:ext cx="9144000" cy="640080"/>
           </a:xfrm>
           <a:prstGeom prst="rect">
             <a:avLst/>
@@ -5773,7 +7613,7 @@
           <a:lstStyle/>
           <a:p>
             <a:pPr algn="l">
-              <a:defRPr sz="3600" b="1">
+              <a:defRPr sz="3600" b="1" i="0">
                 <a:solidFill>
                   <a:srgbClr val="FFFFFF"/>
                 </a:solidFill>
@@ -5781,21 +7621,64 @@
               </a:defRPr>
             </a:pPr>
             <a:r>
-              <a:t>How Preference Reranking Works</a:t>
-            </a:r>
-          </a:p>
-        </p:txBody>
-      </p:sp>
-      <p:sp>
-        <p:nvSpPr>
-          <p:cNvPr id="4" name="TextBox 3"/>
+              <a:t>Engineering Discipline: What I Fixed</a:t>
+            </a:r>
+          </a:p>
+        </p:txBody>
+      </p:sp>
+      <p:sp>
+        <p:nvSpPr>
+          <p:cNvPr id="4" name="Rectangle 3"/>
+          <p:cNvSpPr/>
+          <p:nvPr/>
+        </p:nvSpPr>
+        <p:spPr>
+          <a:xfrm>
+            <a:off x="731520" y="1234440"/>
+            <a:ext cx="10698480" cy="36576"/>
+          </a:xfrm>
+          <a:prstGeom prst="rect">
+            <a:avLst/>
+          </a:prstGeom>
+          <a:solidFill>
+            <a:srgbClr val="FFD166"/>
+          </a:solidFill>
+          <a:ln>
+            <a:noFill/>
+          </a:ln>
+        </p:spPr>
+        <p:style>
+          <a:lnRef idx="1">
+            <a:schemeClr val="accent1"/>
+          </a:lnRef>
+          <a:fillRef idx="3">
+            <a:schemeClr val="accent1"/>
+          </a:fillRef>
+          <a:effectRef idx="2">
+            <a:schemeClr val="accent1"/>
+          </a:effectRef>
+          <a:fontRef idx="minor">
+            <a:schemeClr val="lt1"/>
+          </a:fontRef>
+        </p:style>
+        <p:txBody>
+          <a:bodyPr rtlCol="0" anchor="ctr"/>
+          <a:lstStyle/>
+          <a:p>
+            <a:pPr algn="ctr"/>
+          </a:p>
+        </p:txBody>
+      </p:sp>
+      <p:sp>
+        <p:nvSpPr>
+          <p:cNvPr id="5" name="TextBox 4"/>
           <p:cNvSpPr txBox="1"/>
           <p:nvPr/>
         </p:nvSpPr>
         <p:spPr>
           <a:xfrm>
-            <a:off x="1371600" y="2011680"/>
-            <a:ext cx="9144000" cy="548640"/>
+            <a:off x="822960" y="1463040"/>
+            <a:ext cx="10058400" cy="502920"/>
           </a:xfrm>
           <a:prstGeom prst="rect">
             <a:avLst/>
@@ -5808,30 +7691,73 @@
           </a:bodyPr>
           <a:lstStyle/>
           <a:p>
-            <a:pPr algn="ctr">
-              <a:defRPr sz="2400" b="1">
-                <a:solidFill>
-                  <a:srgbClr val="4EC9B0"/>
-                </a:solidFill>
-                <a:latin typeface="Consolas"/>
-              </a:defRPr>
-            </a:pPr>
-            <a:r>
-              <a:t>final_score  =  base_score  +  0.15 × goal_bonus  −  0.15 × avoid_penalty</a:t>
-            </a:r>
-          </a:p>
-        </p:txBody>
-      </p:sp>
-      <p:sp>
-        <p:nvSpPr>
-          <p:cNvPr id="5" name="TextBox 4"/>
+            <a:pPr algn="l">
+              <a:defRPr sz="2000" b="0" i="1">
+                <a:solidFill>
+                  <a:srgbClr val="888899"/>
+                </a:solidFill>
+                <a:latin typeface="Calibri"/>
+              </a:defRPr>
+            </a:pPr>
+            <a:r>
+              <a:t>Not just new features — I also cut what wasn't working.</a:t>
+            </a:r>
+          </a:p>
+        </p:txBody>
+      </p:sp>
+      <p:sp>
+        <p:nvSpPr>
+          <p:cNvPr id="6" name="Rectangle 5"/>
+          <p:cNvSpPr/>
+          <p:nvPr/>
+        </p:nvSpPr>
+        <p:spPr>
+          <a:xfrm>
+            <a:off x="822960" y="2194560"/>
+            <a:ext cx="4937760" cy="3017520"/>
+          </a:xfrm>
+          <a:prstGeom prst="rect">
+            <a:avLst/>
+          </a:prstGeom>
+          <a:solidFill>
+            <a:srgbClr val="1A1A1A"/>
+          </a:solidFill>
+          <a:ln>
+            <a:noFill/>
+          </a:ln>
+        </p:spPr>
+        <p:style>
+          <a:lnRef idx="1">
+            <a:schemeClr val="accent1"/>
+          </a:lnRef>
+          <a:fillRef idx="3">
+            <a:schemeClr val="accent1"/>
+          </a:fillRef>
+          <a:effectRef idx="2">
+            <a:schemeClr val="accent1"/>
+          </a:effectRef>
+          <a:fontRef idx="minor">
+            <a:schemeClr val="lt1"/>
+          </a:fontRef>
+        </p:style>
+        <p:txBody>
+          <a:bodyPr rtlCol="0" anchor="ctr"/>
+          <a:lstStyle/>
+          <a:p>
+            <a:pPr algn="ctr"/>
+          </a:p>
+        </p:txBody>
+      </p:sp>
+      <p:sp>
+        <p:nvSpPr>
+          <p:cNvPr id="7" name="TextBox 6"/>
           <p:cNvSpPr txBox="1"/>
           <p:nvPr/>
         </p:nvSpPr>
         <p:spPr>
           <a:xfrm>
-            <a:off x="1371600" y="3200400"/>
-            <a:ext cx="9144000" cy="3200400"/>
+            <a:off x="914400" y="2331720"/>
+            <a:ext cx="4572000" cy="411480"/>
           </a:xfrm>
           <a:prstGeom prst="rect">
             <a:avLst/>
@@ -5844,83 +7770,348 @@
           </a:bodyPr>
           <a:lstStyle/>
           <a:p>
+            <a:pPr algn="l">
+              <a:defRPr sz="1700" b="1" i="0">
+                <a:solidFill>
+                  <a:srgbClr val="FF6B6B"/>
+                </a:solidFill>
+                <a:latin typeface="Calibri"/>
+              </a:defRPr>
+            </a:pPr>
+            <a:r>
+              <a:t>Before</a:t>
+            </a:r>
+          </a:p>
+        </p:txBody>
+      </p:sp>
+      <p:sp>
+        <p:nvSpPr>
+          <p:cNvPr id="8" name="TextBox 7"/>
+          <p:cNvSpPr txBox="1"/>
+          <p:nvPr/>
+        </p:nvSpPr>
+        <p:spPr>
+          <a:xfrm>
+            <a:off x="914400" y="2834640"/>
+            <a:ext cx="4572000" cy="2194560"/>
+          </a:xfrm>
+          <a:prstGeom prst="rect">
+            <a:avLst/>
+          </a:prstGeom>
+          <a:noFill/>
+        </p:spPr>
+        <p:txBody>
+          <a:bodyPr wrap="square">
+            <a:spAutoFit/>
+          </a:bodyPr>
+          <a:lstStyle/>
+          <a:p>
             <a:pPr>
               <a:spcAft>
-                <a:spcPts val="800"/>
+                <a:spcPts val="1000"/>
               </a:spcAft>
-              <a:defRPr sz="1800">
-                <a:solidFill>
-                  <a:srgbClr val="FFFFFF"/>
-                </a:solidFill>
-                <a:latin typeface="Calibri"/>
-              </a:defRPr>
-            </a:pPr>
-            <a:r>
-              <a:t>Base score: cosine similarity between query and result (from FAISS search)</a:t>
+              <a:defRPr sz="1500">
+                <a:solidFill>
+                  <a:srgbClr val="E8E8E8"/>
+                </a:solidFill>
+                <a:latin typeface="Calibri"/>
+              </a:defRPr>
+            </a:pPr>
+            <a:r>
+              <a:t>  Broken training pipeline (WardrobeNet missing)</a:t>
             </a:r>
           </a:p>
           <a:p>
             <a:pPr>
               <a:spcAft>
-                <a:spcPts val="800"/>
+                <a:spcPts val="1000"/>
               </a:spcAft>
-              <a:defRPr sz="1800">
-                <a:solidFill>
-                  <a:srgbClr val="FFFFFF"/>
-                </a:solidFill>
-                <a:latin typeface="Calibri"/>
-              </a:defRPr>
-            </a:pPr>
-            <a:r>
-              <a:t>Goal bonus: similarity between result image and goal text prompt (e.g., "a formal outfit")</a:t>
+              <a:defRPr sz="1500">
+                <a:solidFill>
+                  <a:srgbClr val="E8E8E8"/>
+                </a:solidFill>
+                <a:latin typeface="Calibri"/>
+              </a:defRPr>
+            </a:pPr>
+            <a:r>
+              <a:t>  Stubbed evaluate.py with dummy predictions</a:t>
             </a:r>
           </a:p>
           <a:p>
             <a:pPr>
               <a:spcAft>
-                <a:spcPts val="800"/>
+                <a:spcPts val="1000"/>
               </a:spcAft>
-              <a:defRPr sz="1800">
-                <a:solidFill>
-                  <a:srgbClr val="FFFFFF"/>
-                </a:solidFill>
-                <a:latin typeface="Calibri"/>
-              </a:defRPr>
-            </a:pPr>
-            <a:r>
-              <a:t>Avoid penalty: similarity between result image and avoid text prompt (e.g., "a hooded garment")</a:t>
+              <a:defRPr sz="1500">
+                <a:solidFill>
+                  <a:srgbClr val="E8E8E8"/>
+                </a:solidFill>
+                <a:latin typeface="Calibri"/>
+              </a:defRPr>
+            </a:pPr>
+            <a:r>
+              <a:t>  Unused config files referencing wrong model</a:t>
             </a:r>
           </a:p>
           <a:p>
             <a:pPr>
               <a:spcAft>
-                <a:spcPts val="800"/>
+                <a:spcPts val="1000"/>
               </a:spcAft>
-              <a:defRPr sz="1800">
-                <a:solidFill>
-                  <a:srgbClr val="FFFFFF"/>
-                </a:solidFill>
-                <a:latin typeface="Calibri"/>
-              </a:defRPr>
-            </a:pPr>
-            <a:r>
-              <a:t>Alpha = 0.15 controls how much preferences shift the ranking</a:t>
-            </a:r>
-          </a:p>
+              <a:defRPr sz="1500">
+                <a:solidFill>
+                  <a:srgbClr val="E8E8E8"/>
+                </a:solidFill>
+                <a:latin typeface="Calibri"/>
+              </a:defRPr>
+            </a:pPr>
+            <a:r>
+              <a:t>  Two disconnected systems in one repo</a:t>
+            </a:r>
+          </a:p>
+        </p:txBody>
+      </p:sp>
+      <p:sp>
+        <p:nvSpPr>
+          <p:cNvPr id="9" name="Rectangle 8"/>
+          <p:cNvSpPr/>
+          <p:nvPr/>
+        </p:nvSpPr>
+        <p:spPr>
+          <a:xfrm>
+            <a:off x="6400800" y="2194560"/>
+            <a:ext cx="4937760" cy="3017520"/>
+          </a:xfrm>
+          <a:prstGeom prst="rect">
+            <a:avLst/>
+          </a:prstGeom>
+          <a:solidFill>
+            <a:srgbClr val="1A1A1A"/>
+          </a:solidFill>
+          <a:ln>
+            <a:noFill/>
+          </a:ln>
+        </p:spPr>
+        <p:style>
+          <a:lnRef idx="1">
+            <a:schemeClr val="accent1"/>
+          </a:lnRef>
+          <a:fillRef idx="3">
+            <a:schemeClr val="accent1"/>
+          </a:fillRef>
+          <a:effectRef idx="2">
+            <a:schemeClr val="accent1"/>
+          </a:effectRef>
+          <a:fontRef idx="minor">
+            <a:schemeClr val="lt1"/>
+          </a:fontRef>
+        </p:style>
+        <p:txBody>
+          <a:bodyPr rtlCol="0" anchor="ctr"/>
+          <a:lstStyle/>
+          <a:p>
+            <a:pPr algn="ctr"/>
+          </a:p>
+        </p:txBody>
+      </p:sp>
+      <p:sp>
+        <p:nvSpPr>
+          <p:cNvPr id="10" name="TextBox 9"/>
+          <p:cNvSpPr txBox="1"/>
+          <p:nvPr/>
+        </p:nvSpPr>
+        <p:spPr>
+          <a:xfrm>
+            <a:off x="6492240" y="2331720"/>
+            <a:ext cx="4572000" cy="411480"/>
+          </a:xfrm>
+          <a:prstGeom prst="rect">
+            <a:avLst/>
+          </a:prstGeom>
+          <a:noFill/>
+        </p:spPr>
+        <p:txBody>
+          <a:bodyPr wrap="square">
+            <a:spAutoFit/>
+          </a:bodyPr>
+          <a:lstStyle/>
+          <a:p>
+            <a:pPr algn="l">
+              <a:defRPr sz="1700" b="1" i="0">
+                <a:solidFill>
+                  <a:srgbClr val="00C9A7"/>
+                </a:solidFill>
+                <a:latin typeface="Calibri"/>
+              </a:defRPr>
+            </a:pPr>
+            <a:r>
+              <a:t>After</a:t>
+            </a:r>
+          </a:p>
+        </p:txBody>
+      </p:sp>
+      <p:sp>
+        <p:nvSpPr>
+          <p:cNvPr id="11" name="TextBox 10"/>
+          <p:cNvSpPr txBox="1"/>
+          <p:nvPr/>
+        </p:nvSpPr>
+        <p:spPr>
+          <a:xfrm>
+            <a:off x="6492240" y="2834640"/>
+            <a:ext cx="4572000" cy="2194560"/>
+          </a:xfrm>
+          <a:prstGeom prst="rect">
+            <a:avLst/>
+          </a:prstGeom>
+          <a:noFill/>
+        </p:spPr>
+        <p:txBody>
+          <a:bodyPr wrap="square">
+            <a:spAutoFit/>
+          </a:bodyPr>
+          <a:lstStyle/>
           <a:p>
             <a:pPr>
               <a:spcAft>
-                <a:spcPts val="800"/>
+                <a:spcPts val="1000"/>
               </a:spcAft>
-              <a:defRPr sz="1800">
-                <a:solidFill>
-                  <a:srgbClr val="FFFFFF"/>
-                </a:solidFill>
-                <a:latin typeface="Calibri"/>
-              </a:defRPr>
-            </a:pPr>
-            <a:r>
-              <a:t>Results are re-sorted by final score — order changes, not the items themselves</a:t>
+              <a:defRPr sz="1500">
+                <a:solidFill>
+                  <a:srgbClr val="E8E8E8"/>
+                </a:solidFill>
+                <a:latin typeface="Calibri"/>
+              </a:defRPr>
+            </a:pPr>
+            <a:r>
+              <a:t>  Moved broken code to experimental/ (preserved, not deleted)</a:t>
+            </a:r>
+          </a:p>
+          <a:p>
+            <a:pPr>
+              <a:spcAft>
+                <a:spcPts val="1000"/>
+              </a:spcAft>
+              <a:defRPr sz="1500">
+                <a:solidFill>
+                  <a:srgbClr val="E8E8E8"/>
+                </a:solidFill>
+                <a:latin typeface="Calibri"/>
+              </a:defRPr>
+            </a:pPr>
+            <a:r>
+              <a:t>  src/ has only 4 files — all connected to the demo</a:t>
+            </a:r>
+          </a:p>
+          <a:p>
+            <a:pPr>
+              <a:spcAft>
+                <a:spcPts val="1000"/>
+              </a:spcAft>
+              <a:defRPr sz="1500">
+                <a:solidFill>
+                  <a:srgbClr val="E8E8E8"/>
+                </a:solidFill>
+                <a:latin typeface="Calibri"/>
+              </a:defRPr>
+            </a:pPr>
+            <a:r>
+              <a:t>  README matches syllabus requirements exactly</a:t>
+            </a:r>
+          </a:p>
+          <a:p>
+            <a:pPr>
+              <a:spcAft>
+                <a:spcPts val="1000"/>
+              </a:spcAft>
+              <a:defRPr sz="1500">
+                <a:solidFill>
+                  <a:srgbClr val="E8E8E8"/>
+                </a:solidFill>
+                <a:latin typeface="Calibri"/>
+              </a:defRPr>
+            </a:pPr>
+            <a:r>
+              <a:t>  One working pipeline, clearly documented</a:t>
+            </a:r>
+          </a:p>
+        </p:txBody>
+      </p:sp>
+      <p:sp>
+        <p:nvSpPr>
+          <p:cNvPr id="12" name="Rectangle 11"/>
+          <p:cNvSpPr/>
+          <p:nvPr/>
+        </p:nvSpPr>
+        <p:spPr>
+          <a:xfrm>
+            <a:off x="731520" y="5806440"/>
+            <a:ext cx="10698480" cy="685800"/>
+          </a:xfrm>
+          <a:prstGeom prst="rect">
+            <a:avLst/>
+          </a:prstGeom>
+          <a:solidFill>
+            <a:srgbClr val="1A1A1A"/>
+          </a:solidFill>
+          <a:ln>
+            <a:noFill/>
+          </a:ln>
+        </p:spPr>
+        <p:style>
+          <a:lnRef idx="1">
+            <a:schemeClr val="accent1"/>
+          </a:lnRef>
+          <a:fillRef idx="3">
+            <a:schemeClr val="accent1"/>
+          </a:fillRef>
+          <a:effectRef idx="2">
+            <a:schemeClr val="accent1"/>
+          </a:effectRef>
+          <a:fontRef idx="minor">
+            <a:schemeClr val="lt1"/>
+          </a:fontRef>
+        </p:style>
+        <p:txBody>
+          <a:bodyPr rtlCol="0" anchor="ctr"/>
+          <a:lstStyle/>
+          <a:p>
+            <a:pPr algn="ctr"/>
+          </a:p>
+        </p:txBody>
+      </p:sp>
+      <p:sp>
+        <p:nvSpPr>
+          <p:cNvPr id="13" name="TextBox 12"/>
+          <p:cNvSpPr txBox="1"/>
+          <p:nvPr/>
+        </p:nvSpPr>
+        <p:spPr>
+          <a:xfrm>
+            <a:off x="1005840" y="5879592"/>
+            <a:ext cx="10149840" cy="548640"/>
+          </a:xfrm>
+          <a:prstGeom prst="rect">
+            <a:avLst/>
+          </a:prstGeom>
+          <a:noFill/>
+        </p:spPr>
+        <p:txBody>
+          <a:bodyPr wrap="square">
+            <a:spAutoFit/>
+          </a:bodyPr>
+          <a:lstStyle/>
+          <a:p>
+            <a:pPr algn="ctr">
+              <a:defRPr sz="2200" b="1" i="0">
+                <a:solidFill>
+                  <a:srgbClr val="FFD166"/>
+                </a:solidFill>
+                <a:latin typeface="Calibri"/>
+              </a:defRPr>
+            </a:pPr>
+            <a:r>
+              <a:t>"I prioritized a clean, working pipeline over incomplete features."</a:t>
             </a:r>
           </a:p>
         </p:txBody>
@@ -5939,7 +8130,7 @@
     <p:bg>
       <p:bgPr>
         <a:solidFill>
-          <a:srgbClr val="1A1A2E"/>
+          <a:srgbClr val="0F0F0F"/>
         </a:solidFill>
         <a:effectLst/>
       </p:bgPr>
@@ -5953,14 +8144,57 @@
       <p:grpSpPr/>
       <p:sp>
         <p:nvSpPr>
-          <p:cNvPr id="2" name="TextBox 1"/>
+          <p:cNvPr id="2" name="Rectangle 1"/>
+          <p:cNvSpPr/>
+          <p:nvPr/>
+        </p:nvSpPr>
+        <p:spPr>
+          <a:xfrm>
+            <a:off x="0" y="0"/>
+            <a:ext cx="54864" cy="6858000"/>
+          </a:xfrm>
+          <a:prstGeom prst="rect">
+            <a:avLst/>
+          </a:prstGeom>
+          <a:solidFill>
+            <a:srgbClr val="00C9A7"/>
+          </a:solidFill>
+          <a:ln>
+            <a:noFill/>
+          </a:ln>
+        </p:spPr>
+        <p:style>
+          <a:lnRef idx="1">
+            <a:schemeClr val="accent1"/>
+          </a:lnRef>
+          <a:fillRef idx="3">
+            <a:schemeClr val="accent1"/>
+          </a:fillRef>
+          <a:effectRef idx="2">
+            <a:schemeClr val="accent1"/>
+          </a:effectRef>
+          <a:fontRef idx="minor">
+            <a:schemeClr val="lt1"/>
+          </a:fontRef>
+        </p:style>
+        <p:txBody>
+          <a:bodyPr rtlCol="0" anchor="ctr"/>
+          <a:lstStyle/>
+          <a:p>
+            <a:pPr algn="ctr"/>
+          </a:p>
+        </p:txBody>
+      </p:sp>
+      <p:sp>
+        <p:nvSpPr>
+          <p:cNvPr id="3" name="TextBox 2"/>
           <p:cNvSpPr txBox="1"/>
           <p:nvPr/>
         </p:nvSpPr>
         <p:spPr>
           <a:xfrm>
-            <a:off x="914400" y="2286000"/>
-            <a:ext cx="10058400" cy="1097280"/>
+            <a:off x="822960" y="502920"/>
+            <a:ext cx="9144000" cy="640080"/>
           </a:xfrm>
           <a:prstGeom prst="rect">
             <a:avLst/>
@@ -5973,8 +8207,8 @@
           </a:bodyPr>
           <a:lstStyle/>
           <a:p>
-            <a:pPr algn="ctr">
-              <a:defRPr sz="4800" b="1">
+            <a:pPr algn="l">
+              <a:defRPr sz="3600" b="1" i="0">
                 <a:solidFill>
                   <a:srgbClr val="FFFFFF"/>
                 </a:solidFill>
@@ -5982,21 +8216,64 @@
               </a:defRPr>
             </a:pPr>
             <a:r>
-              <a:t>Live Demo</a:t>
-            </a:r>
-          </a:p>
-        </p:txBody>
-      </p:sp>
-      <p:sp>
-        <p:nvSpPr>
-          <p:cNvPr id="3" name="TextBox 2"/>
+              <a:t>What's Next</a:t>
+            </a:r>
+          </a:p>
+        </p:txBody>
+      </p:sp>
+      <p:sp>
+        <p:nvSpPr>
+          <p:cNvPr id="4" name="Rectangle 3"/>
+          <p:cNvSpPr/>
+          <p:nvPr/>
+        </p:nvSpPr>
+        <p:spPr>
+          <a:xfrm>
+            <a:off x="731520" y="1234440"/>
+            <a:ext cx="10698480" cy="36576"/>
+          </a:xfrm>
+          <a:prstGeom prst="rect">
+            <a:avLst/>
+          </a:prstGeom>
+          <a:solidFill>
+            <a:srgbClr val="00C9A7"/>
+          </a:solidFill>
+          <a:ln>
+            <a:noFill/>
+          </a:ln>
+        </p:spPr>
+        <p:style>
+          <a:lnRef idx="1">
+            <a:schemeClr val="accent1"/>
+          </a:lnRef>
+          <a:fillRef idx="3">
+            <a:schemeClr val="accent1"/>
+          </a:fillRef>
+          <a:effectRef idx="2">
+            <a:schemeClr val="accent1"/>
+          </a:effectRef>
+          <a:fontRef idx="minor">
+            <a:schemeClr val="lt1"/>
+          </a:fontRef>
+        </p:style>
+        <p:txBody>
+          <a:bodyPr rtlCol="0" anchor="ctr"/>
+          <a:lstStyle/>
+          <a:p>
+            <a:pPr algn="ctr"/>
+          </a:p>
+        </p:txBody>
+      </p:sp>
+      <p:sp>
+        <p:nvSpPr>
+          <p:cNvPr id="5" name="TextBox 4"/>
           <p:cNvSpPr txBox="1"/>
           <p:nvPr/>
         </p:nvSpPr>
         <p:spPr>
           <a:xfrm>
-            <a:off x="914400" y="3657600"/>
-            <a:ext cx="10058400" cy="731520"/>
+            <a:off x="822960" y="1463040"/>
+            <a:ext cx="10058400" cy="502920"/>
           </a:xfrm>
           <a:prstGeom prst="rect">
             <a:avLst/>
@@ -6009,30 +8286,73 @@
           </a:bodyPr>
           <a:lstStyle/>
           <a:p>
-            <a:pPr algn="ctr">
-              <a:defRPr sz="2800" b="0">
-                <a:solidFill>
-                  <a:srgbClr val="4EC9B0"/>
-                </a:solidFill>
-                <a:latin typeface="Consolas"/>
-              </a:defRPr>
-            </a:pPr>
-            <a:r>
-              <a:t>streamlit run app.py</a:t>
-            </a:r>
-          </a:p>
-        </p:txBody>
-      </p:sp>
-      <p:sp>
-        <p:nvSpPr>
-          <p:cNvPr id="4" name="TextBox 3"/>
+            <a:pPr algn="l">
+              <a:defRPr sz="2000" b="0" i="1">
+                <a:solidFill>
+                  <a:srgbClr val="888899"/>
+                </a:solidFill>
+                <a:latin typeface="Calibri"/>
+              </a:defRPr>
+            </a:pPr>
+            <a:r>
+              <a:t>Realistic next steps — not promises.</a:t>
+            </a:r>
+          </a:p>
+        </p:txBody>
+      </p:sp>
+      <p:sp>
+        <p:nvSpPr>
+          <p:cNvPr id="6" name="Rectangle 5"/>
+          <p:cNvSpPr/>
+          <p:nvPr/>
+        </p:nvSpPr>
+        <p:spPr>
+          <a:xfrm>
+            <a:off x="822960" y="2377440"/>
+            <a:ext cx="73152" cy="822960"/>
+          </a:xfrm>
+          <a:prstGeom prst="rect">
+            <a:avLst/>
+          </a:prstGeom>
+          <a:solidFill>
+            <a:srgbClr val="00C9A7"/>
+          </a:solidFill>
+          <a:ln>
+            <a:noFill/>
+          </a:ln>
+        </p:spPr>
+        <p:style>
+          <a:lnRef idx="1">
+            <a:schemeClr val="accent1"/>
+          </a:lnRef>
+          <a:fillRef idx="3">
+            <a:schemeClr val="accent1"/>
+          </a:fillRef>
+          <a:effectRef idx="2">
+            <a:schemeClr val="accent1"/>
+          </a:effectRef>
+          <a:fontRef idx="minor">
+            <a:schemeClr val="lt1"/>
+          </a:fontRef>
+        </p:style>
+        <p:txBody>
+          <a:bodyPr rtlCol="0" anchor="ctr"/>
+          <a:lstStyle/>
+          <a:p>
+            <a:pPr algn="ctr"/>
+          </a:p>
+        </p:txBody>
+      </p:sp>
+      <p:sp>
+        <p:nvSpPr>
+          <p:cNvPr id="7" name="TextBox 6"/>
           <p:cNvSpPr txBox="1"/>
           <p:nvPr/>
         </p:nvSpPr>
         <p:spPr>
           <a:xfrm>
-            <a:off x="914400" y="4754880"/>
-            <a:ext cx="10058400" cy="731520"/>
+            <a:off x="1097280" y="2377440"/>
+            <a:ext cx="3657600" cy="457200"/>
           </a:xfrm>
           <a:prstGeom prst="rect">
             <a:avLst/>
@@ -6045,16 +8365,282 @@
           </a:bodyPr>
           <a:lstStyle/>
           <a:p>
-            <a:pPr algn="ctr">
-              <a:defRPr sz="1800" b="0">
-                <a:solidFill>
-                  <a:srgbClr val="BBBBCC"/>
-                </a:solidFill>
-                <a:latin typeface="Calibri"/>
-              </a:defRPr>
-            </a:pPr>
-            <a:r>
-              <a:t>Upload image  →  Retrieve similar items  →  Apply preferences  →  See reranked results</a:t>
+            <a:pPr algn="l">
+              <a:defRPr sz="2000" b="1" i="0">
+                <a:solidFill>
+                  <a:srgbClr val="FFFFFF"/>
+                </a:solidFill>
+                <a:latin typeface="Calibri"/>
+              </a:defRPr>
+            </a:pPr>
+            <a:r>
+              <a:t>Persistent Feedback</a:t>
+            </a:r>
+          </a:p>
+        </p:txBody>
+      </p:sp>
+      <p:sp>
+        <p:nvSpPr>
+          <p:cNvPr id="8" name="TextBox 7"/>
+          <p:cNvSpPr txBox="1"/>
+          <p:nvPr/>
+        </p:nvSpPr>
+        <p:spPr>
+          <a:xfrm>
+            <a:off x="1097280" y="2834640"/>
+            <a:ext cx="10058400" cy="502920"/>
+          </a:xfrm>
+          <a:prstGeom prst="rect">
+            <a:avLst/>
+          </a:prstGeom>
+          <a:noFill/>
+        </p:spPr>
+        <p:txBody>
+          <a:bodyPr wrap="square">
+            <a:spAutoFit/>
+          </a:bodyPr>
+          <a:lstStyle/>
+          <a:p>
+            <a:pPr algn="l">
+              <a:defRPr sz="1700" b="0" i="0">
+                <a:solidFill>
+                  <a:srgbClr val="888899"/>
+                </a:solidFill>
+                <a:latin typeface="Calibri"/>
+              </a:defRPr>
+            </a:pPr>
+            <a:r>
+              <a:t>Store user likes and dislikes across sessions to personalize retrieval over time.</a:t>
+            </a:r>
+          </a:p>
+        </p:txBody>
+      </p:sp>
+      <p:sp>
+        <p:nvSpPr>
+          <p:cNvPr id="9" name="Rectangle 8"/>
+          <p:cNvSpPr/>
+          <p:nvPr/>
+        </p:nvSpPr>
+        <p:spPr>
+          <a:xfrm>
+            <a:off x="822960" y="3657600"/>
+            <a:ext cx="73152" cy="822960"/>
+          </a:xfrm>
+          <a:prstGeom prst="rect">
+            <a:avLst/>
+          </a:prstGeom>
+          <a:solidFill>
+            <a:srgbClr val="00C9A7"/>
+          </a:solidFill>
+          <a:ln>
+            <a:noFill/>
+          </a:ln>
+        </p:spPr>
+        <p:style>
+          <a:lnRef idx="1">
+            <a:schemeClr val="accent1"/>
+          </a:lnRef>
+          <a:fillRef idx="3">
+            <a:schemeClr val="accent1"/>
+          </a:fillRef>
+          <a:effectRef idx="2">
+            <a:schemeClr val="accent1"/>
+          </a:effectRef>
+          <a:fontRef idx="minor">
+            <a:schemeClr val="lt1"/>
+          </a:fontRef>
+        </p:style>
+        <p:txBody>
+          <a:bodyPr rtlCol="0" anchor="ctr"/>
+          <a:lstStyle/>
+          <a:p>
+            <a:pPr algn="ctr"/>
+          </a:p>
+        </p:txBody>
+      </p:sp>
+      <p:sp>
+        <p:nvSpPr>
+          <p:cNvPr id="10" name="TextBox 9"/>
+          <p:cNvSpPr txBox="1"/>
+          <p:nvPr/>
+        </p:nvSpPr>
+        <p:spPr>
+          <a:xfrm>
+            <a:off x="1097280" y="3657600"/>
+            <a:ext cx="3657600" cy="457200"/>
+          </a:xfrm>
+          <a:prstGeom prst="rect">
+            <a:avLst/>
+          </a:prstGeom>
+          <a:noFill/>
+        </p:spPr>
+        <p:txBody>
+          <a:bodyPr wrap="square">
+            <a:spAutoFit/>
+          </a:bodyPr>
+          <a:lstStyle/>
+          <a:p>
+            <a:pPr algn="l">
+              <a:defRPr sz="2000" b="1" i="0">
+                <a:solidFill>
+                  <a:srgbClr val="FFFFFF"/>
+                </a:solidFill>
+                <a:latin typeface="Calibri"/>
+              </a:defRPr>
+            </a:pPr>
+            <a:r>
+              <a:t>Larger Catalog</a:t>
+            </a:r>
+          </a:p>
+        </p:txBody>
+      </p:sp>
+      <p:sp>
+        <p:nvSpPr>
+          <p:cNvPr id="11" name="TextBox 10"/>
+          <p:cNvSpPr txBox="1"/>
+          <p:nvPr/>
+        </p:nvSpPr>
+        <p:spPr>
+          <a:xfrm>
+            <a:off x="1097280" y="4114800"/>
+            <a:ext cx="10058400" cy="502920"/>
+          </a:xfrm>
+          <a:prstGeom prst="rect">
+            <a:avLst/>
+          </a:prstGeom>
+          <a:noFill/>
+        </p:spPr>
+        <p:txBody>
+          <a:bodyPr wrap="square">
+            <a:spAutoFit/>
+          </a:bodyPr>
+          <a:lstStyle/>
+          <a:p>
+            <a:pPr algn="l">
+              <a:defRPr sz="1700" b="0" i="0">
+                <a:solidFill>
+                  <a:srgbClr val="888899"/>
+                </a:solidFill>
+                <a:latin typeface="Calibri"/>
+              </a:defRPr>
+            </a:pPr>
+            <a:r>
+              <a:t>More catalog images = better coverage. Results improve directly with catalog variety.</a:t>
+            </a:r>
+          </a:p>
+        </p:txBody>
+      </p:sp>
+      <p:sp>
+        <p:nvSpPr>
+          <p:cNvPr id="12" name="Rectangle 11"/>
+          <p:cNvSpPr/>
+          <p:nvPr/>
+        </p:nvSpPr>
+        <p:spPr>
+          <a:xfrm>
+            <a:off x="822960" y="4937760"/>
+            <a:ext cx="73152" cy="822960"/>
+          </a:xfrm>
+          <a:prstGeom prst="rect">
+            <a:avLst/>
+          </a:prstGeom>
+          <a:solidFill>
+            <a:srgbClr val="00C9A7"/>
+          </a:solidFill>
+          <a:ln>
+            <a:noFill/>
+          </a:ln>
+        </p:spPr>
+        <p:style>
+          <a:lnRef idx="1">
+            <a:schemeClr val="accent1"/>
+          </a:lnRef>
+          <a:fillRef idx="3">
+            <a:schemeClr val="accent1"/>
+          </a:fillRef>
+          <a:effectRef idx="2">
+            <a:schemeClr val="accent1"/>
+          </a:effectRef>
+          <a:fontRef idx="minor">
+            <a:schemeClr val="lt1"/>
+          </a:fontRef>
+        </p:style>
+        <p:txBody>
+          <a:bodyPr rtlCol="0" anchor="ctr"/>
+          <a:lstStyle/>
+          <a:p>
+            <a:pPr algn="ctr"/>
+          </a:p>
+        </p:txBody>
+      </p:sp>
+      <p:sp>
+        <p:nvSpPr>
+          <p:cNvPr id="13" name="TextBox 12"/>
+          <p:cNvSpPr txBox="1"/>
+          <p:nvPr/>
+        </p:nvSpPr>
+        <p:spPr>
+          <a:xfrm>
+            <a:off x="1097280" y="4937760"/>
+            <a:ext cx="3657600" cy="457200"/>
+          </a:xfrm>
+          <a:prstGeom prst="rect">
+            <a:avLst/>
+          </a:prstGeom>
+          <a:noFill/>
+        </p:spPr>
+        <p:txBody>
+          <a:bodyPr wrap="square">
+            <a:spAutoFit/>
+          </a:bodyPr>
+          <a:lstStyle/>
+          <a:p>
+            <a:pPr algn="l">
+              <a:defRPr sz="2000" b="1" i="0">
+                <a:solidFill>
+                  <a:srgbClr val="FFFFFF"/>
+                </a:solidFill>
+                <a:latin typeface="Calibri"/>
+              </a:defRPr>
+            </a:pPr>
+            <a:r>
+              <a:t>Cloud Deployment</a:t>
+            </a:r>
+          </a:p>
+        </p:txBody>
+      </p:sp>
+      <p:sp>
+        <p:nvSpPr>
+          <p:cNvPr id="14" name="TextBox 13"/>
+          <p:cNvSpPr txBox="1"/>
+          <p:nvPr/>
+        </p:nvSpPr>
+        <p:spPr>
+          <a:xfrm>
+            <a:off x="1097280" y="5394960"/>
+            <a:ext cx="10058400" cy="502920"/>
+          </a:xfrm>
+          <a:prstGeom prst="rect">
+            <a:avLst/>
+          </a:prstGeom>
+          <a:noFill/>
+        </p:spPr>
+        <p:txBody>
+          <a:bodyPr wrap="square">
+            <a:spAutoFit/>
+          </a:bodyPr>
+          <a:lstStyle/>
+          <a:p>
+            <a:pPr algn="l">
+              <a:defRPr sz="1700" b="0" i="0">
+                <a:solidFill>
+                  <a:srgbClr val="888899"/>
+                </a:solidFill>
+                <a:latin typeface="Calibri"/>
+              </a:defRPr>
+            </a:pPr>
+            <a:r>
+              <a:t>Deploy to Streamlit Cloud or Render so the demo runs without a local setup.</a:t>
             </a:r>
           </a:p>
         </p:txBody>
@@ -6073,7 +8659,7 @@
     <p:bg>
       <p:bgPr>
         <a:solidFill>
-          <a:srgbClr val="1A1A2E"/>
+          <a:srgbClr val="0F0F0F"/>
         </a:solidFill>
         <a:effectLst/>
       </p:bgPr>
@@ -6093,14 +8679,14 @@
         </p:nvSpPr>
         <p:spPr>
           <a:xfrm>
-            <a:off x="731520" y="731520"/>
-            <a:ext cx="73152" cy="548640"/>
+            <a:off x="0" y="0"/>
+            <a:ext cx="12191695" cy="6858000"/>
           </a:xfrm>
           <a:prstGeom prst="rect">
             <a:avLst/>
           </a:prstGeom>
           <a:solidFill>
-            <a:srgbClr val="533CD0"/>
+            <a:srgbClr val="0F0F0F"/>
           </a:solidFill>
           <a:ln>
             <a:noFill/>
@@ -6136,8 +8722,8 @@
         </p:nvSpPr>
         <p:spPr>
           <a:xfrm>
-            <a:off x="1005840" y="640080"/>
-            <a:ext cx="9144000" cy="731520"/>
+            <a:off x="914400" y="1828800"/>
+            <a:ext cx="10058400" cy="914400"/>
           </a:xfrm>
           <a:prstGeom prst="rect">
             <a:avLst/>
@@ -6150,8 +8736,8 @@
           </a:bodyPr>
           <a:lstStyle/>
           <a:p>
-            <a:pPr algn="l">
-              <a:defRPr sz="3600" b="1">
+            <a:pPr algn="ctr">
+              <a:defRPr sz="5200" b="1" i="0">
                 <a:solidFill>
                   <a:srgbClr val="FFFFFF"/>
                 </a:solidFill>
@@ -6159,21 +8745,64 @@
               </a:defRPr>
             </a:pPr>
             <a:r>
-              <a:t>Limitations &amp; Future Work</a:t>
-            </a:r>
-          </a:p>
-        </p:txBody>
-      </p:sp>
-      <p:sp>
-        <p:nvSpPr>
-          <p:cNvPr id="4" name="TextBox 3"/>
+              <a:t>Live Demo</a:t>
+            </a:r>
+          </a:p>
+        </p:txBody>
+      </p:sp>
+      <p:sp>
+        <p:nvSpPr>
+          <p:cNvPr id="4" name="Rectangle 3"/>
+          <p:cNvSpPr/>
+          <p:nvPr/>
+        </p:nvSpPr>
+        <p:spPr>
+          <a:xfrm>
+            <a:off x="3200400" y="3017520"/>
+            <a:ext cx="5760720" cy="685800"/>
+          </a:xfrm>
+          <a:prstGeom prst="rect">
+            <a:avLst/>
+          </a:prstGeom>
+          <a:solidFill>
+            <a:srgbClr val="1A1A1A"/>
+          </a:solidFill>
+          <a:ln>
+            <a:noFill/>
+          </a:ln>
+        </p:spPr>
+        <p:style>
+          <a:lnRef idx="1">
+            <a:schemeClr val="accent1"/>
+          </a:lnRef>
+          <a:fillRef idx="3">
+            <a:schemeClr val="accent1"/>
+          </a:fillRef>
+          <a:effectRef idx="2">
+            <a:schemeClr val="accent1"/>
+          </a:effectRef>
+          <a:fontRef idx="minor">
+            <a:schemeClr val="lt1"/>
+          </a:fontRef>
+        </p:style>
+        <p:txBody>
+          <a:bodyPr rtlCol="0" anchor="ctr"/>
+          <a:lstStyle/>
+          <a:p>
+            <a:pPr algn="ctr"/>
+          </a:p>
+        </p:txBody>
+      </p:sp>
+      <p:sp>
+        <p:nvSpPr>
+          <p:cNvPr id="5" name="TextBox 4"/>
           <p:cNvSpPr txBox="1"/>
           <p:nvPr/>
         </p:nvSpPr>
         <p:spPr>
           <a:xfrm>
-            <a:off x="1005840" y="1737360"/>
-            <a:ext cx="4572000" cy="457200"/>
+            <a:off x="3291840" y="3090672"/>
+            <a:ext cx="5577840" cy="548640"/>
           </a:xfrm>
           <a:prstGeom prst="rect">
             <a:avLst/>
@@ -6186,30 +8815,30 @@
           </a:bodyPr>
           <a:lstStyle/>
           <a:p>
-            <a:pPr algn="l">
-              <a:defRPr sz="2200" b="1">
-                <a:solidFill>
-                  <a:srgbClr val="E05E5E"/>
-                </a:solidFill>
-                <a:latin typeface="Calibri"/>
-              </a:defRPr>
-            </a:pPr>
-            <a:r>
-              <a:t>Current Limitations</a:t>
-            </a:r>
-          </a:p>
-        </p:txBody>
-      </p:sp>
-      <p:sp>
-        <p:nvSpPr>
-          <p:cNvPr id="5" name="TextBox 4"/>
+            <a:pPr algn="ctr">
+              <a:defRPr sz="2400" b="1" i="0">
+                <a:solidFill>
+                  <a:srgbClr val="00C9A7"/>
+                </a:solidFill>
+                <a:latin typeface="Consolas"/>
+              </a:defRPr>
+            </a:pPr>
+            <a:r>
+              <a:t>streamlit run app.py</a:t>
+            </a:r>
+          </a:p>
+        </p:txBody>
+      </p:sp>
+      <p:sp>
+        <p:nvSpPr>
+          <p:cNvPr id="6" name="TextBox 5"/>
           <p:cNvSpPr txBox="1"/>
           <p:nvPr/>
         </p:nvSpPr>
         <p:spPr>
           <a:xfrm>
-            <a:off x="1005840" y="2377440"/>
-            <a:ext cx="4572000" cy="2743200"/>
+            <a:off x="914400" y="4023360"/>
+            <a:ext cx="10058400" cy="548640"/>
           </a:xfrm>
           <a:prstGeom prst="rect">
             <a:avLst/>
@@ -6222,190 +8851,16 @@
           </a:bodyPr>
           <a:lstStyle/>
           <a:p>
-            <a:pPr>
-              <a:spcAft>
-                <a:spcPts val="800"/>
-              </a:spcAft>
-              <a:defRPr sz="1700">
-                <a:solidFill>
-                  <a:srgbClr val="BBBBCC"/>
-                </a:solidFill>
-                <a:latin typeface="Calibri"/>
-              </a:defRPr>
-            </a:pPr>
-            <a:r>
-              <a:t>Retrieval depends on catalog size and variety</a:t>
-            </a:r>
-          </a:p>
-          <a:p>
-            <a:pPr>
-              <a:spcAft>
-                <a:spcPts val="800"/>
-              </a:spcAft>
-              <a:defRPr sz="1700">
-                <a:solidFill>
-                  <a:srgbClr val="BBBBCC"/>
-                </a:solidFill>
-                <a:latin typeface="Calibri"/>
-              </a:defRPr>
-            </a:pPr>
-            <a:r>
-              <a:t>Preferences are per-session, not persisted</a:t>
-            </a:r>
-          </a:p>
-          <a:p>
-            <a:pPr>
-              <a:spcAft>
-                <a:spcPts val="800"/>
-              </a:spcAft>
-              <a:defRPr sz="1700">
-                <a:solidFill>
-                  <a:srgbClr val="BBBBCC"/>
-                </a:solidFill>
-                <a:latin typeface="Calibri"/>
-              </a:defRPr>
-            </a:pPr>
-            <a:r>
-              <a:t>Local only — no cloud deployment</a:t>
-            </a:r>
-          </a:p>
-          <a:p>
-            <a:pPr>
-              <a:spcAft>
-                <a:spcPts val="800"/>
-              </a:spcAft>
-              <a:defRPr sz="1700">
-                <a:solidFill>
-                  <a:srgbClr val="BBBBCC"/>
-                </a:solidFill>
-                <a:latin typeface="Calibri"/>
-              </a:defRPr>
-            </a:pPr>
-            <a:r>
-              <a:t>May still struggle with very niche garment types</a:t>
-            </a:r>
-          </a:p>
-        </p:txBody>
-      </p:sp>
-      <p:sp>
-        <p:nvSpPr>
-          <p:cNvPr id="6" name="TextBox 5"/>
-          <p:cNvSpPr txBox="1"/>
-          <p:nvPr/>
-        </p:nvSpPr>
-        <p:spPr>
-          <a:xfrm>
-            <a:off x="6400800" y="1737360"/>
-            <a:ext cx="4572000" cy="457200"/>
-          </a:xfrm>
-          <a:prstGeom prst="rect">
-            <a:avLst/>
-          </a:prstGeom>
-          <a:noFill/>
-        </p:spPr>
-        <p:txBody>
-          <a:bodyPr wrap="square">
-            <a:spAutoFit/>
-          </a:bodyPr>
-          <a:lstStyle/>
-          <a:p>
-            <a:pPr algn="l">
-              <a:defRPr sz="2200" b="1">
-                <a:solidFill>
-                  <a:srgbClr val="4EC9B0"/>
-                </a:solidFill>
-                <a:latin typeface="Calibri"/>
-              </a:defRPr>
-            </a:pPr>
-            <a:r>
-              <a:t>Future Improvements</a:t>
-            </a:r>
-          </a:p>
-        </p:txBody>
-      </p:sp>
-      <p:sp>
-        <p:nvSpPr>
-          <p:cNvPr id="7" name="TextBox 6"/>
-          <p:cNvSpPr txBox="1"/>
-          <p:nvPr/>
-        </p:nvSpPr>
-        <p:spPr>
-          <a:xfrm>
-            <a:off x="6400800" y="2377440"/>
-            <a:ext cx="4572000" cy="2743200"/>
-          </a:xfrm>
-          <a:prstGeom prst="rect">
-            <a:avLst/>
-          </a:prstGeom>
-          <a:noFill/>
-        </p:spPr>
-        <p:txBody>
-          <a:bodyPr wrap="square">
-            <a:spAutoFit/>
-          </a:bodyPr>
-          <a:lstStyle/>
-          <a:p>
-            <a:pPr>
-              <a:spcAft>
-                <a:spcPts val="800"/>
-              </a:spcAft>
-              <a:defRPr sz="1700">
-                <a:solidFill>
-                  <a:srgbClr val="BBBBCC"/>
-                </a:solidFill>
-                <a:latin typeface="Calibri"/>
-              </a:defRPr>
-            </a:pPr>
-            <a:r>
-              <a:t>Persistent feedback storage (learn from likes/dislikes)</a:t>
-            </a:r>
-          </a:p>
-          <a:p>
-            <a:pPr>
-              <a:spcAft>
-                <a:spcPts val="800"/>
-              </a:spcAft>
-              <a:defRPr sz="1700">
-                <a:solidFill>
-                  <a:srgbClr val="BBBBCC"/>
-                </a:solidFill>
-                <a:latin typeface="Calibri"/>
-              </a:defRPr>
-            </a:pPr>
-            <a:r>
-              <a:t>API backend (FastAPI) for separation of concerns</a:t>
-            </a:r>
-          </a:p>
-          <a:p>
-            <a:pPr>
-              <a:spcAft>
-                <a:spcPts val="800"/>
-              </a:spcAft>
-              <a:defRPr sz="1700">
-                <a:solidFill>
-                  <a:srgbClr val="BBBBCC"/>
-                </a:solidFill>
-                <a:latin typeface="Calibri"/>
-              </a:defRPr>
-            </a:pPr>
-            <a:r>
-              <a:t>Cloud deployment (Streamlit Cloud or Render)</a:t>
-            </a:r>
-          </a:p>
-          <a:p>
-            <a:pPr>
-              <a:spcAft>
-                <a:spcPts val="800"/>
-              </a:spcAft>
-              <a:defRPr sz="1700">
-                <a:solidFill>
-                  <a:srgbClr val="BBBBCC"/>
-                </a:solidFill>
-                <a:latin typeface="Calibri"/>
-              </a:defRPr>
-            </a:pPr>
-            <a:r>
-              <a:t>Larger, curated catalog for better coverage</a:t>
+            <a:pPr algn="ctr">
+              <a:defRPr sz="1800" b="0" i="0">
+                <a:solidFill>
+                  <a:srgbClr val="888899"/>
+                </a:solidFill>
+                <a:latin typeface="Calibri"/>
+              </a:defRPr>
+            </a:pPr>
+            <a:r>
+              <a:t>Upload  →  Retrieve  →  Preference Filter  →  Reranked Results</a:t>
             </a:r>
           </a:p>
         </p:txBody>
